--- a/전기버스_충전인프라_선행연구_검토.pptx
+++ b/전기버스_충전인프라_선행연구_검토.pptx
@@ -26,6 +26,7 @@
     <p:sldId id="274" r:id="rId25"/>
     <p:sldId id="275" r:id="rId26"/>
     <p:sldId id="276" r:id="rId27"/>
+    <p:sldId id="277" r:id="rId28"/>
   </p:sldIdLst>
   <p:notesMasterIdLst>
     <p:notesMasterId r:id="rId15"/>
@@ -591,7 +592,7 @@
           <a:lstStyle/>
           <a:p>
             <a:r>
-              <a:t>맨 아래가 이번에 새로 넣은 국내 문헌이다. 원자료는 못 받지만 충전이벤트 컬럼 명세가 논문에 그대로 실려 있어서, 우리가 사업자에 자료를 요청할 때 그 표를 명세서로 쓸 수 있다. 나머지 다섯 편 중 He와 Vijay 둘만 원자료 요청 없이 재현된다. 두 논문 다 기관 협조 없이 공개 시각표·공개 GIS·공시 요금만으로 Q1·Q2 저널에 실렸다는 게 중요하다. 데이터 확보 리스크를 없애는 경로가 이미 검증돼 있다는 뜻이다.</a:t>
+              <a:t>앞 장의 가동률 10.3%가 유럽 한 노선의 특수 사정인지 확인할 국내 근거가 생겼다. 박지영 외(2024)가 수원여객 북부차고지 1년치 충전 실적을 분석한 국내 유일의 실측 문헌이다. 오른쪽 아래 15~19%는 논문에 없는 값이고, 저자가 제시한 수치로 우리가 계산한 것이다. 충전기 46기에 24시간이면 1,104 충전기·시간인데 차량 점유는 86대 곱하기 145분으로 약 208시간, 18.8%다. 145분이 단일노선 71대 평균이라 분모를 71대로 잡으면 15.5%로 내려간다. 어느 쪽이든 20%를 넘지 않는다. 인용할 때는 반드시 우리 계산이라고 밝혀야 한다. 중요한 건 나라도 다르고 충전 유형도 다른데 결론이 같다는 점이다. 충전기는 모자란 게 아니라 놀고 있다. 그리고 충전 간격이 두세 시간에 몰린다는 건 심야에 한 번에 몰아 충전하는 게 아니라 운행 중간에 들어와 충전한다는 뜻이고, 이게 배차를 얼마나 잡아먹는지는 아무도 계산하지 않았다.</a:t>
             </a:r>
           </a:p>
         </p:txBody>
@@ -661,7 +662,7 @@
           <a:lstStyle/>
           <a:p>
             <a:r>
-              <a:t>충전 스케줄링은 Zhou–Meng–Ong 팀이 TR-B와 TR-C를 잡고 있어 여기서 경쟁하면 이기기 어렵다. 반면 시각표와 승무는 아무도 손대지 않았다. 입지와 운영을 같이 푼 건 Liu(2021) 하나인데, 그것도 배차를 시간당 집계 대수로만 다룬다.</a:t>
+              <a:t>맨 아래가 이번에 새로 넣은 국내 문헌이다. 원자료는 못 받지만 충전이벤트 컬럼 명세가 논문에 그대로 실려 있어서, 우리가 사업자에 자료를 요청할 때 그 표를 명세서로 쓸 수 있다. 나머지 다섯 편 중 He와 Vijay 둘만 원자료 요청 없이 재현된다. 두 논문 다 기관 협조 없이 공개 시각표·공개 GIS·공시 요금만으로 Q1·Q2 저널에 실렸다는 게 중요하다. 데이터 확보 리스크를 없애는 경로가 이미 검증돼 있다는 뜻이다.</a:t>
             </a:r>
           </a:p>
         </p:txBody>
@@ -731,7 +732,7 @@
           <a:lstStyle/>
           <a:p>
             <a:r>
-              <a:t>Ashkezari(2024) 리뷰가 충전 지연의 결과로 "disruption of subsequent bus dispatches and crew schedules"를 명시하고, 운영 층위에서 시각표를 최적화해야 한다고까지 적었다. 그런데 실제로 그렇게 한 논문이 우리 목록에 없다. 리뷰가 필요하다고 한 걸 아무도 안 한 상태다. 국내도 같다. 박지영 외(2024)가 국내 유일의 실측 분석인데, 결론이 "충전 전략을 고려한 운행노선 재배치가 중요하다"는 제언에서 끝난다. 국책연구기관이 필요하다고 지목해 놓고 아무도 풀지 않은 자리다.</a:t>
+              <a:t>충전 스케줄링은 Zhou–Meng–Ong 팀이 TR-B와 TR-C를 잡고 있어 여기서 경쟁하면 이기기 어렵다. 반면 시각표와 승무는 아무도 손대지 않았다. 입지와 운영을 같이 푼 건 Liu(2021) 하나인데, 그것도 배차를 시간당 집계 대수로만 다룬다.</a:t>
             </a:r>
           </a:p>
         </p:txBody>
@@ -801,7 +802,7 @@
           <a:lstStyle/>
           <a:p>
             <a:r>
-              <a:t>목적은 결과가 아니라 파이프라인 확인이다. 원자료를 DTUMOS 수요 규격으로 바꾸고, 서울 KTDB 도로망 76,701개 링크 위에서 Rust 경로탐색으로 끝까지 도는 것까지 확인했다. 3,000건 2시간이 8초 걸렸다. 세 회차는 차량과 수요를 같이 늘린 것이라 통제된 민감도 분석이 아니다 — 앞의 두 회차는 수요/차량 비가 10으로 같은데 서비스율이 79.5%에서 88.1%로 오르고, 세 번째는 비가 15로 올라가 69.4%로 떨어진다. 규모 효과와 혼잡이 섞여 있어 이걸 결과로 주장하지는 않는다.</a:t>
+              <a:t>Ashkezari(2024) 리뷰가 충전 지연의 결과로 "disruption of subsequent bus dispatches and crew schedules"를 명시하고, 운영 층위에서 시각표를 최적화해야 한다고까지 적었다. 그런데 실제로 그렇게 한 논문이 우리 목록에 없다. 리뷰가 필요하다고 한 걸 아무도 안 한 상태다. 국내도 같다. 박지영 외(2024)가 국내 유일의 실측 분석인데, 결론이 "충전 전략을 고려한 운행노선 재배치가 중요하다"는 제언에서 끝난다. 국책연구기관이 필요하다고 지목해 놓고 아무도 풀지 않은 자리다.</a:t>
             </a:r>
           </a:p>
         </p:txBody>
@@ -827,6 +828,76 @@
 </file>
 
 <file path=ppt/notesSlides/notesSlide14.xml><?xml version="1.0" encoding="utf-8"?>
+<p:notes xmlns:a="http://schemas.openxmlformats.org/drawingml/2006/main" xmlns:p="http://schemas.openxmlformats.org/presentationml/2006/main" xmlns:r="http://schemas.openxmlformats.org/officeDocument/2006/relationships">
+  <p:cSld>
+    <p:spTree>
+      <p:nvGrpSpPr>
+        <p:cNvPr id="1" name=""/>
+        <p:cNvGrpSpPr/>
+        <p:nvPr/>
+      </p:nvGrpSpPr>
+      <p:grpSpPr>
+        <a:xfrm>
+          <a:off x="0" y="0"/>
+          <a:ext cx="0" cy="0"/>
+          <a:chOff x="0" y="0"/>
+          <a:chExt cx="0" cy="0"/>
+        </a:xfrm>
+      </p:grpSpPr>
+      <p:sp>
+        <p:nvSpPr>
+          <p:cNvPr id="2" name="Slide Image Placeholder 1"/>
+          <p:cNvSpPr>
+            <a:spLocks noGrp="1"/>
+          </p:cNvSpPr>
+          <p:nvPr>
+            <p:ph type="sldImg" idx="2"/>
+          </p:nvPr>
+        </p:nvSpPr>
+        <p:spPr/>
+      </p:sp>
+      <p:sp>
+        <p:nvSpPr>
+          <p:cNvPr id="3" name="Notes Placeholder 2"/>
+          <p:cNvSpPr>
+            <a:spLocks noGrp="1"/>
+          </p:cNvSpPr>
+          <p:nvPr>
+            <p:ph type="body" idx="3" sz="quarter"/>
+          </p:nvPr>
+        </p:nvSpPr>
+        <p:spPr/>
+        <p:txBody>
+          <a:bodyPr/>
+          <a:lstStyle/>
+          <a:p>
+            <a:r>
+              <a:t>목적은 결과가 아니라 파이프라인 확인이다. 원자료를 DTUMOS 수요 규격으로 바꾸고, 서울 KTDB 도로망 76,701개 링크 위에서 Rust 경로탐색으로 끝까지 도는 것까지 확인했다. 3,000건 2시간이 8초 걸렸다. 세 회차는 차량과 수요를 같이 늘린 것이라 통제된 민감도 분석이 아니다 — 앞의 두 회차는 수요/차량 비가 10으로 같은데 서비스율이 79.5%에서 88.1%로 오르고, 세 번째는 비가 15로 올라가 69.4%로 떨어진다. 규모 효과와 혼잡이 섞여 있어 이걸 결과로 주장하지는 않는다.</a:t>
+            </a:r>
+          </a:p>
+        </p:txBody>
+      </p:sp>
+      <p:sp>
+        <p:nvSpPr>
+          <p:cNvPr id="4" name="Slide Number Placeholder 3"/>
+          <p:cNvSpPr>
+            <a:spLocks noGrp="1"/>
+          </p:cNvSpPr>
+          <p:nvPr>
+            <p:ph type="sldNum" idx="5" sz="quarter"/>
+          </p:nvPr>
+        </p:nvSpPr>
+        <p:spPr/>
+      </p:sp>
+    </p:spTree>
+  </p:cSld>
+  <p:clrMapOvr>
+    <a:masterClrMapping/>
+  </p:clrMapOvr>
+</p:notes>
+</file>
+
+<file path=ppt/notesSlides/notesSlide15.xml><?xml version="1.0" encoding="utf-8"?>
 <p:notes xmlns:a="http://schemas.openxmlformats.org/drawingml/2006/main" xmlns:p="http://schemas.openxmlformats.org/presentationml/2006/main" xmlns:r="http://schemas.openxmlformats.org/officeDocument/2006/relationships">
   <p:cSld>
     <p:spTree>
@@ -5041,7 +5112,7 @@
           <a:lstStyle/>
           <a:p>
             <a:r>
-              <a:t>2026년 9월 4일 (금)</a:t>
+              <a:t>2026년 9월 8일 (화)</a:t>
             </a:r>
           </a:p>
         </p:txBody>
@@ -6882,6 +6953,24 @@
               <a:t>3.2  </a:t>
             </a:r>
             <a:r>
+              <a:t>국내 실측 — 수원여객 차고지</a:t>
+            </a:r>
+          </a:p>
+          <a:p>
+            <a:pPr>
+              <a:spcAft>
+                <a:spcPts val="1000"/>
+              </a:spcAft>
+            </a:pPr>
+            <a:r>
+              <a:rPr>
+                <a:solidFill>
+                  <a:srgbClr val="AFAFAF"/>
+                </a:solidFill>
+              </a:rPr>
+              <a:t>3.3  </a:t>
+            </a:r>
+            <a:r>
               <a:t>데이터와 국내 재현 가능성</a:t>
             </a:r>
           </a:p>
@@ -7087,7 +7176,7 @@
           <a:lstStyle/>
           <a:p>
             <a:r>
-              <a:t>3.2 데이터와 국내 재현 가능성</a:t>
+              <a:t>3.2 국내 실측 — 수원여객 차고지</a:t>
             </a:r>
           </a:p>
         </p:txBody>
@@ -7128,35 +7217,74 @@
           <a:bodyPr/>
           <a:lstStyle/>
           <a:p>
-            <a:r>
-              <a:t>표 6. 논문별 데이터 출처·공개 수준과 국내 대응 자료</a:t>
+            <a:pPr/>
+            <a:r>
+              <a:t>2023년 1년 · 충전이벤트 78,928건</a:t>
+            </a:r>
+          </a:p>
+          <a:p>
+            <a:pPr lvl="1"/>
+            <a:r>
+              <a:t>전기버스 86대 · 200kW 충전기 46기</a:t>
+            </a:r>
+          </a:p>
+          <a:p>
+            <a:pPr/>
+            <a:r>
+              <a:t>1일 3.6회 · 248kWh · 145분 충전</a:t>
+            </a:r>
+          </a:p>
+          <a:p>
+            <a:pPr/>
+            <a:r>
+              <a:t>충전 간격 최빈 2~3시간 — 심야 일괄이 아님</a:t>
+            </a:r>
+          </a:p>
+        </p:txBody>
+      </p:sp>
+      <p:sp>
+        <p:nvSpPr>
+          <p:cNvPr id="5" name="Text Placeholder 4"/>
+          <p:cNvSpPr>
+            <a:spLocks noGrp="1"/>
+          </p:cNvSpPr>
+          <p:nvPr>
+            <p:ph type="body" idx="103"/>
+          </p:nvPr>
+        </p:nvSpPr>
+        <p:spPr/>
+        <p:txBody>
+          <a:bodyPr/>
+          <a:lstStyle/>
+          <a:p>
+            <a:r>
+              <a:t>표 6. 충전기 가동률 — 해외 종점충전과 국내 차고지충전</a:t>
             </a:r>
           </a:p>
         </p:txBody>
       </p:sp>
       <p:graphicFrame>
         <p:nvGraphicFramePr>
-          <p:cNvPr id="5" name="Table Placeholder 4"/>
+          <p:cNvPr id="6" name="Table Placeholder 5"/>
           <p:cNvGraphicFramePr>
             <a:graphicFrameLocks noGrp="1"/>
           </p:cNvGraphicFramePr>
           <p:nvPr>
-            <p:ph type="tbl" idx="103"/>
+            <p:ph type="tbl" idx="104"/>
           </p:nvPr>
         </p:nvGraphicFramePr>
         <p:xfrm>
-          <a:off x="685800" y="1828800"/>
-          <a:ext cx="10820095" cy="3581400"/>
+          <a:off x="4937760" y="1828800"/>
+          <a:ext cx="6565392" cy="1676400"/>
         </p:xfrm>
         <a:graphic>
           <a:graphicData uri="http://schemas.openxmlformats.org/drawingml/2006/table">
             <a:tbl>
               <a:tblPr firstRow="0" bandRow="0" firstCol="0" lastRow="0" lastCol="0" bandCol="0"/>
               <a:tblGrid>
-                <a:gridCol w="2705023"/>
-                <a:gridCol w="2705023"/>
-                <a:gridCol w="2705023"/>
-                <a:gridCol w="2705026"/>
+                <a:gridCol w="2188464"/>
+                <a:gridCol w="2188464"/>
+                <a:gridCol w="2188464"/>
               </a:tblGrid>
               <a:tr h="406400">
                 <a:tc>
@@ -7171,7 +7299,7 @@
                           </a:solidFill>
                           <a:latin typeface="Pretendard Medium"/>
                         </a:rPr>
-                        <a:t>논문</a:t>
+                        <a:t>사례</a:t>
                       </a:r>
                     </a:p>
                   </a:txBody>
@@ -7205,7 +7333,7 @@
                           </a:solidFill>
                           <a:latin typeface="Pretendard Medium"/>
                         </a:rPr>
-                        <a:t>데이터</a:t>
+                        <a:t>충전기</a:t>
                       </a:r>
                     </a:p>
                   </a:txBody>
@@ -7239,41 +7367,7 @@
                           </a:solidFill>
                           <a:latin typeface="Pretendard Medium"/>
                         </a:rPr>
-                        <a:t>공개</a:t>
-                      </a:r>
-                    </a:p>
-                  </a:txBody>
-                  <a:tcPr marL="101600" marR="101600" marT="76200" marB="76200" anchor="ctr">
-                    <a:solidFill>
-                      <a:srgbClr val="000000"/>
-                    </a:solidFill>
-                    <a:lnL w="0">
-                      <a:noFill/>
-                    </a:lnL>
-                    <a:lnR w="0">
-                      <a:noFill/>
-                    </a:lnR>
-                    <a:lnT w="0">
-                      <a:noFill/>
-                    </a:lnT>
-                    <a:lnB w="0">
-                      <a:noFill/>
-                    </a:lnB>
-                  </a:tcPr>
-                </a:tc>
-                <a:tc>
-                  <a:txBody>
-                    <a:bodyPr/>
-                    <a:lstStyle/>
-                    <a:p>
-                      <a:r>
-                        <a:rPr sz="1300" b="0">
-                          <a:solidFill>
-                            <a:srgbClr val="FFFFFF"/>
-                          </a:solidFill>
-                          <a:latin typeface="Pretendard Medium"/>
-                        </a:rPr>
-                        <a:t>국내 대응</a:t>
+                        <a:t>가동률</a:t>
                       </a:r>
                     </a:p>
                   </a:txBody>
@@ -7309,7 +7403,7 @@
                           </a:solidFill>
                           <a:latin typeface="Pretendard"/>
                         </a:rPr>
-                        <a:t>He (2020)</a:t>
+                        <a:t>예테보리 16번 (Zeng 2023)</a:t>
                       </a:r>
                     </a:p>
                   </a:txBody>
@@ -7345,7 +7439,7 @@
                           </a:solidFill>
                           <a:latin typeface="Pretendard Medium"/>
                         </a:rPr>
-                        <a:t>유타 GIS + 시각표 + 공시 요금</a:t>
+                        <a:t>종점 급속 2기</a:t>
                       </a:r>
                     </a:p>
                   </a:txBody>
@@ -7381,7 +7475,7 @@
                           </a:solidFill>
                           <a:latin typeface="Pretendard Medium"/>
                         </a:rPr>
-                        <a:t>전부 공개</a:t>
+                        <a:t>10.3%</a:t>
                       </a:r>
                     </a:p>
                   </a:txBody>
@@ -7405,19 +7499,21 @@
                     </a:lnB>
                   </a:tcPr>
                 </a:tc>
-                <a:tc>
-                  <a:txBody>
-                    <a:bodyPr/>
-                    <a:lstStyle/>
-                    <a:p>
-                      <a:r>
-                        <a:rPr sz="1300" b="0">
-                          <a:solidFill>
-                            <a:srgbClr val="5E5E5E"/>
-                          </a:solidFill>
-                          <a:latin typeface="Pretendard Medium"/>
-                        </a:rPr>
-                        <a:t>국가공간정보포털, TAGO, 한전 요금표</a:t>
+              </a:tr>
+              <a:tr h="635000">
+                <a:tc>
+                  <a:txBody>
+                    <a:bodyPr/>
+                    <a:lstStyle/>
+                    <a:p>
+                      <a:r>
+                        <a:rPr sz="1300" b="1">
+                          <a:solidFill>
+                            <a:srgbClr val="000000"/>
+                          </a:solidFill>
+                          <a:latin typeface="Pretendard"/>
+                        </a:rPr>
+                        <a:t>수원여객 북부 (박지영 2024)</a:t>
                       </a:r>
                     </a:p>
                   </a:txBody>
@@ -7441,21 +7537,19 @@
                     </a:lnB>
                   </a:tcPr>
                 </a:tc>
-              </a:tr>
-              <a:tr h="635000">
-                <a:tc>
-                  <a:txBody>
-                    <a:bodyPr/>
-                    <a:lstStyle/>
-                    <a:p>
-                      <a:r>
-                        <a:rPr sz="1300" b="1">
-                          <a:solidFill>
-                            <a:srgbClr val="000000"/>
-                          </a:solidFill>
-                          <a:latin typeface="Pretendard"/>
-                        </a:rPr>
-                        <a:t>Vijay (2023)</a:t>
+                <a:tc>
+                  <a:txBody>
+                    <a:bodyPr/>
+                    <a:lstStyle/>
+                    <a:p>
+                      <a:r>
+                        <a:rPr sz="1300" b="0">
+                          <a:solidFill>
+                            <a:srgbClr val="5E5E5E"/>
+                          </a:solidFill>
+                          <a:latin typeface="Pretendard Medium"/>
+                        </a:rPr>
+                        <a:t>차고지 200kW 46기</a:t>
                       </a:r>
                     </a:p>
                   </a:txBody>
@@ -7491,517 +7585,7 @@
                           </a:solidFill>
                           <a:latin typeface="Pretendard Medium"/>
                         </a:rPr>
-                        <a:t>GTFS + 승객 오픈데이터 + Google API</a:t>
-                      </a:r>
-                    </a:p>
-                  </a:txBody>
-                  <a:tcPr marL="101600" marR="101600" marT="101600" marB="101600" anchor="ctr">
-                    <a:solidFill>
-                      <a:srgbClr val="FFFFFF"/>
-                    </a:solidFill>
-                    <a:lnL w="0">
-                      <a:noFill/>
-                    </a:lnL>
-                    <a:lnR w="0">
-                      <a:noFill/>
-                    </a:lnR>
-                    <a:lnT w="0">
-                      <a:noFill/>
-                    </a:lnT>
-                    <a:lnB w="9525">
-                      <a:solidFill>
-                        <a:srgbClr val="E2E2E2"/>
-                      </a:solidFill>
-                    </a:lnB>
-                  </a:tcPr>
-                </a:tc>
-                <a:tc>
-                  <a:txBody>
-                    <a:bodyPr/>
-                    <a:lstStyle/>
-                    <a:p>
-                      <a:r>
-                        <a:rPr sz="1300" b="0">
-                          <a:solidFill>
-                            <a:srgbClr val="5E5E5E"/>
-                          </a:solidFill>
-                          <a:latin typeface="Pretendard Medium"/>
-                        </a:rPr>
-                        <a:t>전부 공개</a:t>
-                      </a:r>
-                    </a:p>
-                  </a:txBody>
-                  <a:tcPr marL="101600" marR="101600" marT="101600" marB="101600" anchor="ctr">
-                    <a:solidFill>
-                      <a:srgbClr val="FFFFFF"/>
-                    </a:solidFill>
-                    <a:lnL w="0">
-                      <a:noFill/>
-                    </a:lnL>
-                    <a:lnR w="0">
-                      <a:noFill/>
-                    </a:lnR>
-                    <a:lnT w="0">
-                      <a:noFill/>
-                    </a:lnT>
-                    <a:lnB w="9525">
-                      <a:solidFill>
-                        <a:srgbClr val="E2E2E2"/>
-                      </a:solidFill>
-                    </a:lnB>
-                  </a:tcPr>
-                </a:tc>
-                <a:tc>
-                  <a:txBody>
-                    <a:bodyPr/>
-                    <a:lstStyle/>
-                    <a:p>
-                      <a:r>
-                        <a:rPr sz="1300" b="0">
-                          <a:solidFill>
-                            <a:srgbClr val="5E5E5E"/>
-                          </a:solidFill>
-                          <a:latin typeface="Pretendard Medium"/>
-                        </a:rPr>
-                        <a:t>TAGO GTFS, 교통카드 통계</a:t>
-                      </a:r>
-                    </a:p>
-                  </a:txBody>
-                  <a:tcPr marL="101600" marR="101600" marT="101600" marB="101600" anchor="ctr">
-                    <a:solidFill>
-                      <a:srgbClr val="FFFFFF"/>
-                    </a:solidFill>
-                    <a:lnL w="0">
-                      <a:noFill/>
-                    </a:lnL>
-                    <a:lnR w="0">
-                      <a:noFill/>
-                    </a:lnR>
-                    <a:lnT w="0">
-                      <a:noFill/>
-                    </a:lnT>
-                    <a:lnB w="9525">
-                      <a:solidFill>
-                        <a:srgbClr val="E2E2E2"/>
-                      </a:solidFill>
-                    </a:lnB>
-                  </a:tcPr>
-                </a:tc>
-              </a:tr>
-              <a:tr h="635000">
-                <a:tc>
-                  <a:txBody>
-                    <a:bodyPr/>
-                    <a:lstStyle/>
-                    <a:p>
-                      <a:r>
-                        <a:rPr sz="1300" b="1">
-                          <a:solidFill>
-                            <a:srgbClr val="000000"/>
-                          </a:solidFill>
-                          <a:latin typeface="Pretendard"/>
-                        </a:rPr>
-                        <a:t>Zhou (2024)</a:t>
-                      </a:r>
-                    </a:p>
-                  </a:txBody>
-                  <a:tcPr marL="101600" marR="101600" marT="101600" marB="101600" anchor="ctr">
-                    <a:solidFill>
-                      <a:srgbClr val="FFFFFF"/>
-                    </a:solidFill>
-                    <a:lnL w="0">
-                      <a:noFill/>
-                    </a:lnL>
-                    <a:lnR w="0">
-                      <a:noFill/>
-                    </a:lnR>
-                    <a:lnT w="0">
-                      <a:noFill/>
-                    </a:lnT>
-                    <a:lnB w="9525">
-                      <a:solidFill>
-                        <a:srgbClr val="E2E2E2"/>
-                      </a:solidFill>
-                    </a:lnB>
-                  </a:tcPr>
-                </a:tc>
-                <a:tc>
-                  <a:txBody>
-                    <a:bodyPr/>
-                    <a:lstStyle/>
-                    <a:p>
-                      <a:r>
-                        <a:rPr sz="1300" b="0">
-                          <a:solidFill>
-                            <a:srgbClr val="5E5E5E"/>
-                          </a:solidFill>
-                          <a:latin typeface="Pretendard Medium"/>
-                        </a:rPr>
-                        <a:t>Tower Transit 400대 · 차고지 4</a:t>
-                      </a:r>
-                    </a:p>
-                  </a:txBody>
-                  <a:tcPr marL="101600" marR="101600" marT="101600" marB="101600" anchor="ctr">
-                    <a:solidFill>
-                      <a:srgbClr val="FFFFFF"/>
-                    </a:solidFill>
-                    <a:lnL w="0">
-                      <a:noFill/>
-                    </a:lnL>
-                    <a:lnR w="0">
-                      <a:noFill/>
-                    </a:lnR>
-                    <a:lnT w="0">
-                      <a:noFill/>
-                    </a:lnT>
-                    <a:lnB w="9525">
-                      <a:solidFill>
-                        <a:srgbClr val="E2E2E2"/>
-                      </a:solidFill>
-                    </a:lnB>
-                  </a:tcPr>
-                </a:tc>
-                <a:tc>
-                  <a:txBody>
-                    <a:bodyPr/>
-                    <a:lstStyle/>
-                    <a:p>
-                      <a:r>
-                        <a:rPr sz="1300" b="0">
-                          <a:solidFill>
-                            <a:srgbClr val="5E5E5E"/>
-                          </a:solidFill>
-                          <a:latin typeface="Pretendard Medium"/>
-                        </a:rPr>
-                        <a:t>인스턴스만 (부록 D)</a:t>
-                      </a:r>
-                    </a:p>
-                  </a:txBody>
-                  <a:tcPr marL="101600" marR="101600" marT="101600" marB="101600" anchor="ctr">
-                    <a:solidFill>
-                      <a:srgbClr val="FFFFFF"/>
-                    </a:solidFill>
-                    <a:lnL w="0">
-                      <a:noFill/>
-                    </a:lnL>
-                    <a:lnR w="0">
-                      <a:noFill/>
-                    </a:lnR>
-                    <a:lnT w="0">
-                      <a:noFill/>
-                    </a:lnT>
-                    <a:lnB w="9525">
-                      <a:solidFill>
-                        <a:srgbClr val="E2E2E2"/>
-                      </a:solidFill>
-                    </a:lnB>
-                  </a:tcPr>
-                </a:tc>
-                <a:tc>
-                  <a:txBody>
-                    <a:bodyPr/>
-                    <a:lstStyle/>
-                    <a:p>
-                      <a:r>
-                        <a:rPr sz="1300" b="0">
-                          <a:solidFill>
-                            <a:srgbClr val="5E5E5E"/>
-                          </a:solidFill>
-                          <a:latin typeface="Pretendard Medium"/>
-                        </a:rPr>
-                        <a:t>벤치마크 30세트 그대로 활용</a:t>
-                      </a:r>
-                    </a:p>
-                  </a:txBody>
-                  <a:tcPr marL="101600" marR="101600" marT="101600" marB="101600" anchor="ctr">
-                    <a:solidFill>
-                      <a:srgbClr val="FFFFFF"/>
-                    </a:solidFill>
-                    <a:lnL w="0">
-                      <a:noFill/>
-                    </a:lnL>
-                    <a:lnR w="0">
-                      <a:noFill/>
-                    </a:lnR>
-                    <a:lnT w="0">
-                      <a:noFill/>
-                    </a:lnT>
-                    <a:lnB w="9525">
-                      <a:solidFill>
-                        <a:srgbClr val="E2E2E2"/>
-                      </a:solidFill>
-                    </a:lnB>
-                  </a:tcPr>
-                </a:tc>
-              </a:tr>
-              <a:tr h="635000">
-                <a:tc>
-                  <a:txBody>
-                    <a:bodyPr/>
-                    <a:lstStyle/>
-                    <a:p>
-                      <a:r>
-                        <a:rPr sz="1300" b="1">
-                          <a:solidFill>
-                            <a:srgbClr val="000000"/>
-                          </a:solidFill>
-                          <a:latin typeface="Pretendard"/>
-                        </a:rPr>
-                        <a:t>Liu (2021)</a:t>
-                      </a:r>
-                    </a:p>
-                  </a:txBody>
-                  <a:tcPr marL="101600" marR="101600" marT="101600" marB="101600" anchor="ctr">
-                    <a:solidFill>
-                      <a:srgbClr val="FFFFFF"/>
-                    </a:solidFill>
-                    <a:lnL w="0">
-                      <a:noFill/>
-                    </a:lnL>
-                    <a:lnR w="0">
-                      <a:noFill/>
-                    </a:lnR>
-                    <a:lnT w="0">
-                      <a:noFill/>
-                    </a:lnT>
-                    <a:lnB w="9525">
-                      <a:solidFill>
-                        <a:srgbClr val="E2E2E2"/>
-                      </a:solidFill>
-                    </a:lnB>
-                  </a:tcPr>
-                </a:tc>
-                <a:tc>
-                  <a:txBody>
-                    <a:bodyPr/>
-                    <a:lstStyle/>
-                    <a:p>
-                      <a:r>
-                        <a:rPr sz="1300" b="0">
-                          <a:solidFill>
-                            <a:srgbClr val="5E5E5E"/>
-                          </a:solidFill>
-                          <a:latin typeface="Pretendard Medium"/>
-                        </a:rPr>
-                        <a:t>베이징 스마트카드 + GPS</a:t>
-                      </a:r>
-                    </a:p>
-                  </a:txBody>
-                  <a:tcPr marL="101600" marR="101600" marT="101600" marB="101600" anchor="ctr">
-                    <a:solidFill>
-                      <a:srgbClr val="FFFFFF"/>
-                    </a:solidFill>
-                    <a:lnL w="0">
-                      <a:noFill/>
-                    </a:lnL>
-                    <a:lnR w="0">
-                      <a:noFill/>
-                    </a:lnR>
-                    <a:lnT w="0">
-                      <a:noFill/>
-                    </a:lnT>
-                    <a:lnB w="9525">
-                      <a:solidFill>
-                        <a:srgbClr val="E2E2E2"/>
-                      </a:solidFill>
-                    </a:lnB>
-                  </a:tcPr>
-                </a:tc>
-                <a:tc>
-                  <a:txBody>
-                    <a:bodyPr/>
-                    <a:lstStyle/>
-                    <a:p>
-                      <a:r>
-                        <a:rPr sz="1300" b="0">
-                          <a:solidFill>
-                            <a:srgbClr val="5E5E5E"/>
-                          </a:solidFill>
-                          <a:latin typeface="Pretendard Medium"/>
-                        </a:rPr>
-                        <a:t>비공개</a:t>
-                      </a:r>
-                    </a:p>
-                  </a:txBody>
-                  <a:tcPr marL="101600" marR="101600" marT="101600" marB="101600" anchor="ctr">
-                    <a:solidFill>
-                      <a:srgbClr val="FFFFFF"/>
-                    </a:solidFill>
-                    <a:lnL w="0">
-                      <a:noFill/>
-                    </a:lnL>
-                    <a:lnR w="0">
-                      <a:noFill/>
-                    </a:lnR>
-                    <a:lnT w="0">
-                      <a:noFill/>
-                    </a:lnT>
-                    <a:lnB w="9525">
-                      <a:solidFill>
-                        <a:srgbClr val="E2E2E2"/>
-                      </a:solidFill>
-                    </a:lnB>
-                  </a:tcPr>
-                </a:tc>
-                <a:tc>
-                  <a:txBody>
-                    <a:bodyPr/>
-                    <a:lstStyle/>
-                    <a:p>
-                      <a:r>
-                        <a:rPr sz="1300" b="0">
-                          <a:solidFill>
-                            <a:srgbClr val="5E5E5E"/>
-                          </a:solidFill>
-                          <a:latin typeface="Pretendard Medium"/>
-                        </a:rPr>
-                        <a:t>교통카드 자료, BIS 운행기록</a:t>
-                      </a:r>
-                    </a:p>
-                  </a:txBody>
-                  <a:tcPr marL="101600" marR="101600" marT="101600" marB="101600" anchor="ctr">
-                    <a:solidFill>
-                      <a:srgbClr val="FFFFFF"/>
-                    </a:solidFill>
-                    <a:lnL w="0">
-                      <a:noFill/>
-                    </a:lnL>
-                    <a:lnR w="0">
-                      <a:noFill/>
-                    </a:lnR>
-                    <a:lnT w="0">
-                      <a:noFill/>
-                    </a:lnT>
-                    <a:lnB w="9525">
-                      <a:solidFill>
-                        <a:srgbClr val="E2E2E2"/>
-                      </a:solidFill>
-                    </a:lnB>
-                  </a:tcPr>
-                </a:tc>
-              </a:tr>
-              <a:tr h="635000">
-                <a:tc>
-                  <a:txBody>
-                    <a:bodyPr/>
-                    <a:lstStyle/>
-                    <a:p>
-                      <a:r>
-                        <a:rPr sz="1300" b="1">
-                          <a:solidFill>
-                            <a:srgbClr val="000000"/>
-                          </a:solidFill>
-                          <a:latin typeface="Pretendard"/>
-                        </a:rPr>
-                        <a:t>박지영 외 (2024)</a:t>
-                      </a:r>
-                    </a:p>
-                  </a:txBody>
-                  <a:tcPr marL="101600" marR="101600" marT="101600" marB="101600" anchor="ctr">
-                    <a:solidFill>
-                      <a:srgbClr val="FFFFFF"/>
-                    </a:solidFill>
-                    <a:lnL w="0">
-                      <a:noFill/>
-                    </a:lnL>
-                    <a:lnR w="0">
-                      <a:noFill/>
-                    </a:lnR>
-                    <a:lnT w="0">
-                      <a:noFill/>
-                    </a:lnT>
-                    <a:lnB w="9525">
-                      <a:solidFill>
-                        <a:srgbClr val="E2E2E2"/>
-                      </a:solidFill>
-                    </a:lnB>
-                  </a:tcPr>
-                </a:tc>
-                <a:tc>
-                  <a:txBody>
-                    <a:bodyPr/>
-                    <a:lstStyle/>
-                    <a:p>
-                      <a:r>
-                        <a:rPr sz="1300" b="0">
-                          <a:solidFill>
-                            <a:srgbClr val="5E5E5E"/>
-                          </a:solidFill>
-                          <a:latin typeface="Pretendard Medium"/>
-                        </a:rPr>
-                        <a:t>수원여객 북부차고지 충전 78,928건</a:t>
-                      </a:r>
-                    </a:p>
-                  </a:txBody>
-                  <a:tcPr marL="101600" marR="101600" marT="101600" marB="101600" anchor="ctr">
-                    <a:solidFill>
-                      <a:srgbClr val="FFFFFF"/>
-                    </a:solidFill>
-                    <a:lnL w="0">
-                      <a:noFill/>
-                    </a:lnL>
-                    <a:lnR w="0">
-                      <a:noFill/>
-                    </a:lnR>
-                    <a:lnT w="0">
-                      <a:noFill/>
-                    </a:lnT>
-                    <a:lnB w="9525">
-                      <a:solidFill>
-                        <a:srgbClr val="E2E2E2"/>
-                      </a:solidFill>
-                    </a:lnB>
-                  </a:tcPr>
-                </a:tc>
-                <a:tc>
-                  <a:txBody>
-                    <a:bodyPr/>
-                    <a:lstStyle/>
-                    <a:p>
-                      <a:r>
-                        <a:rPr sz="1300" b="0">
-                          <a:solidFill>
-                            <a:srgbClr val="5E5E5E"/>
-                          </a:solidFill>
-                          <a:latin typeface="Pretendard Medium"/>
-                        </a:rPr>
-                        <a:t>비공개 (컬럼 명세는 공개)</a:t>
-                      </a:r>
-                    </a:p>
-                  </a:txBody>
-                  <a:tcPr marL="101600" marR="101600" marT="101600" marB="101600" anchor="ctr">
-                    <a:solidFill>
-                      <a:srgbClr val="FFFFFF"/>
-                    </a:solidFill>
-                    <a:lnL w="0">
-                      <a:noFill/>
-                    </a:lnL>
-                    <a:lnR w="0">
-                      <a:noFill/>
-                    </a:lnR>
-                    <a:lnT w="0">
-                      <a:noFill/>
-                    </a:lnT>
-                    <a:lnB w="9525">
-                      <a:solidFill>
-                        <a:srgbClr val="E2E2E2"/>
-                      </a:solidFill>
-                    </a:lnB>
-                  </a:tcPr>
-                </a:tc>
-                <a:tc>
-                  <a:txBody>
-                    <a:bodyPr/>
-                    <a:lstStyle/>
-                    <a:p>
-                      <a:r>
-                        <a:rPr sz="1300" b="0">
-                          <a:solidFill>
-                            <a:srgbClr val="5E5E5E"/>
-                          </a:solidFill>
-                          <a:latin typeface="Pretendard Medium"/>
-                        </a:rPr>
-                        <a:t>국내 실측 그 자체 — 표 1이 요청 명세서</a:t>
+                        <a:t>15~19% (계산)</a:t>
                       </a:r>
                     </a:p>
                   </a:txBody>
@@ -8072,7 +7656,7 @@
             <a:pPr algn="r"/>
             <a:fld id="{F7021451-1387-4CA6-816F-3879F97B5CBC}" type="slidenum">
               <a:rPr b="0" lang="en-US"/>
-              <a:t>1007</a:t>
+              <a:t>1008</a:t>
             </a:fld>
             <a:endParaRPr lang="en-US"/>
           </a:p>
@@ -8098,12 +7682,12 @@
       <p:grpSpPr/>
       <p:sp>
         <p:nvSpPr>
-          <p:cNvPr id="2" name="Text Placeholder 1"/>
+          <p:cNvPr id="2" name="Title 1"/>
           <p:cNvSpPr>
             <a:spLocks noGrp="1"/>
           </p:cNvSpPr>
           <p:nvPr>
-            <p:ph type="body" idx="100"/>
+            <p:ph type="title" idx="100"/>
           </p:nvPr>
         </p:nvSpPr>
         <p:spPr/>
@@ -8112,19 +7696,19 @@
           <a:lstStyle/>
           <a:p>
             <a:r>
-              <a:t>04</a:t>
-            </a:r>
-          </a:p>
-        </p:txBody>
-      </p:sp>
-      <p:sp>
-        <p:nvSpPr>
-          <p:cNvPr id="3" name="Title 2"/>
+              <a:t>3.3 데이터와 국내 재현 가능성</a:t>
+            </a:r>
+          </a:p>
+        </p:txBody>
+      </p:sp>
+      <p:sp>
+        <p:nvSpPr>
+          <p:cNvPr id="3" name="Text Placeholder 2"/>
           <p:cNvSpPr>
             <a:spLocks noGrp="1"/>
           </p:cNvSpPr>
           <p:nvPr>
-            <p:ph type="title" idx="101"/>
+            <p:ph type="body" idx="101"/>
           </p:nvPr>
         </p:nvSpPr>
         <p:spPr/>
@@ -8133,7 +7717,7 @@
           <a:lstStyle/>
           <a:p>
             <a:r>
-              <a:t>현재 연구의 한계</a:t>
+              <a:t>3. 지금까지 밝혀진 것</a:t>
             </a:r>
           </a:p>
         </p:txBody>
@@ -8153,40 +7737,953 @@
           <a:bodyPr/>
           <a:lstStyle/>
           <a:p>
-            <a:pPr>
-              <a:spcAft>
-                <a:spcPts val="1000"/>
-              </a:spcAft>
-            </a:pPr>
-            <a:r>
-              <a:rPr>
+            <a:r>
+              <a:t>표 7. 논문별 데이터 출처·공개 수준과 국내 대응 자료</a:t>
+            </a:r>
+          </a:p>
+        </p:txBody>
+      </p:sp>
+      <p:graphicFrame>
+        <p:nvGraphicFramePr>
+          <p:cNvPr id="5" name="Table Placeholder 4"/>
+          <p:cNvGraphicFramePr>
+            <a:graphicFrameLocks noGrp="1"/>
+          </p:cNvGraphicFramePr>
+          <p:nvPr>
+            <p:ph type="tbl" idx="103"/>
+          </p:nvPr>
+        </p:nvGraphicFramePr>
+        <p:xfrm>
+          <a:off x="685800" y="1828800"/>
+          <a:ext cx="10820095" cy="3581400"/>
+        </p:xfrm>
+        <a:graphic>
+          <a:graphicData uri="http://schemas.openxmlformats.org/drawingml/2006/table">
+            <a:tbl>
+              <a:tblPr firstRow="0" bandRow="0" firstCol="0" lastRow="0" lastCol="0" bandCol="0"/>
+              <a:tblGrid>
+                <a:gridCol w="2705023"/>
+                <a:gridCol w="2705023"/>
+                <a:gridCol w="2705023"/>
+                <a:gridCol w="2705026"/>
+              </a:tblGrid>
+              <a:tr h="406400">
+                <a:tc>
+                  <a:txBody>
+                    <a:bodyPr/>
+                    <a:lstStyle/>
+                    <a:p>
+                      <a:r>
+                        <a:rPr sz="1300" b="0">
+                          <a:solidFill>
+                            <a:srgbClr val="FFFFFF"/>
+                          </a:solidFill>
+                          <a:latin typeface="Pretendard Medium"/>
+                        </a:rPr>
+                        <a:t>논문</a:t>
+                      </a:r>
+                    </a:p>
+                  </a:txBody>
+                  <a:tcPr marL="101600" marR="101600" marT="76200" marB="76200" anchor="ctr">
+                    <a:solidFill>
+                      <a:srgbClr val="000000"/>
+                    </a:solidFill>
+                    <a:lnL w="0">
+                      <a:noFill/>
+                    </a:lnL>
+                    <a:lnR w="0">
+                      <a:noFill/>
+                    </a:lnR>
+                    <a:lnT w="0">
+                      <a:noFill/>
+                    </a:lnT>
+                    <a:lnB w="0">
+                      <a:noFill/>
+                    </a:lnB>
+                  </a:tcPr>
+                </a:tc>
+                <a:tc>
+                  <a:txBody>
+                    <a:bodyPr/>
+                    <a:lstStyle/>
+                    <a:p>
+                      <a:r>
+                        <a:rPr sz="1300" b="0">
+                          <a:solidFill>
+                            <a:srgbClr val="FFFFFF"/>
+                          </a:solidFill>
+                          <a:latin typeface="Pretendard Medium"/>
+                        </a:rPr>
+                        <a:t>데이터</a:t>
+                      </a:r>
+                    </a:p>
+                  </a:txBody>
+                  <a:tcPr marL="101600" marR="101600" marT="76200" marB="76200" anchor="ctr">
+                    <a:solidFill>
+                      <a:srgbClr val="000000"/>
+                    </a:solidFill>
+                    <a:lnL w="0">
+                      <a:noFill/>
+                    </a:lnL>
+                    <a:lnR w="0">
+                      <a:noFill/>
+                    </a:lnR>
+                    <a:lnT w="0">
+                      <a:noFill/>
+                    </a:lnT>
+                    <a:lnB w="0">
+                      <a:noFill/>
+                    </a:lnB>
+                  </a:tcPr>
+                </a:tc>
+                <a:tc>
+                  <a:txBody>
+                    <a:bodyPr/>
+                    <a:lstStyle/>
+                    <a:p>
+                      <a:r>
+                        <a:rPr sz="1300" b="0">
+                          <a:solidFill>
+                            <a:srgbClr val="FFFFFF"/>
+                          </a:solidFill>
+                          <a:latin typeface="Pretendard Medium"/>
+                        </a:rPr>
+                        <a:t>공개</a:t>
+                      </a:r>
+                    </a:p>
+                  </a:txBody>
+                  <a:tcPr marL="101600" marR="101600" marT="76200" marB="76200" anchor="ctr">
+                    <a:solidFill>
+                      <a:srgbClr val="000000"/>
+                    </a:solidFill>
+                    <a:lnL w="0">
+                      <a:noFill/>
+                    </a:lnL>
+                    <a:lnR w="0">
+                      <a:noFill/>
+                    </a:lnR>
+                    <a:lnT w="0">
+                      <a:noFill/>
+                    </a:lnT>
+                    <a:lnB w="0">
+                      <a:noFill/>
+                    </a:lnB>
+                  </a:tcPr>
+                </a:tc>
+                <a:tc>
+                  <a:txBody>
+                    <a:bodyPr/>
+                    <a:lstStyle/>
+                    <a:p>
+                      <a:r>
+                        <a:rPr sz="1300" b="0">
+                          <a:solidFill>
+                            <a:srgbClr val="FFFFFF"/>
+                          </a:solidFill>
+                          <a:latin typeface="Pretendard Medium"/>
+                        </a:rPr>
+                        <a:t>국내 대응</a:t>
+                      </a:r>
+                    </a:p>
+                  </a:txBody>
+                  <a:tcPr marL="101600" marR="101600" marT="76200" marB="76200" anchor="ctr">
+                    <a:solidFill>
+                      <a:srgbClr val="000000"/>
+                    </a:solidFill>
+                    <a:lnL w="0">
+                      <a:noFill/>
+                    </a:lnL>
+                    <a:lnR w="0">
+                      <a:noFill/>
+                    </a:lnR>
+                    <a:lnT w="0">
+                      <a:noFill/>
+                    </a:lnT>
+                    <a:lnB w="0">
+                      <a:noFill/>
+                    </a:lnB>
+                  </a:tcPr>
+                </a:tc>
+              </a:tr>
+              <a:tr h="635000">
+                <a:tc>
+                  <a:txBody>
+                    <a:bodyPr/>
+                    <a:lstStyle/>
+                    <a:p>
+                      <a:r>
+                        <a:rPr sz="1300" b="1">
+                          <a:solidFill>
+                            <a:srgbClr val="000000"/>
+                          </a:solidFill>
+                          <a:latin typeface="Pretendard"/>
+                        </a:rPr>
+                        <a:t>He (2020)</a:t>
+                      </a:r>
+                    </a:p>
+                  </a:txBody>
+                  <a:tcPr marL="101600" marR="101600" marT="101600" marB="101600" anchor="ctr">
+                    <a:solidFill>
+                      <a:srgbClr val="FFFFFF"/>
+                    </a:solidFill>
+                    <a:lnL w="0">
+                      <a:noFill/>
+                    </a:lnL>
+                    <a:lnR w="0">
+                      <a:noFill/>
+                    </a:lnR>
+                    <a:lnT w="0">
+                      <a:noFill/>
+                    </a:lnT>
+                    <a:lnB w="9525">
+                      <a:solidFill>
+                        <a:srgbClr val="E2E2E2"/>
+                      </a:solidFill>
+                    </a:lnB>
+                  </a:tcPr>
+                </a:tc>
+                <a:tc>
+                  <a:txBody>
+                    <a:bodyPr/>
+                    <a:lstStyle/>
+                    <a:p>
+                      <a:r>
+                        <a:rPr sz="1300" b="0">
+                          <a:solidFill>
+                            <a:srgbClr val="5E5E5E"/>
+                          </a:solidFill>
+                          <a:latin typeface="Pretendard Medium"/>
+                        </a:rPr>
+                        <a:t>유타 GIS + 시각표 + 공시 요금</a:t>
+                      </a:r>
+                    </a:p>
+                  </a:txBody>
+                  <a:tcPr marL="101600" marR="101600" marT="101600" marB="101600" anchor="ctr">
+                    <a:solidFill>
+                      <a:srgbClr val="FFFFFF"/>
+                    </a:solidFill>
+                    <a:lnL w="0">
+                      <a:noFill/>
+                    </a:lnL>
+                    <a:lnR w="0">
+                      <a:noFill/>
+                    </a:lnR>
+                    <a:lnT w="0">
+                      <a:noFill/>
+                    </a:lnT>
+                    <a:lnB w="9525">
+                      <a:solidFill>
+                        <a:srgbClr val="E2E2E2"/>
+                      </a:solidFill>
+                    </a:lnB>
+                  </a:tcPr>
+                </a:tc>
+                <a:tc>
+                  <a:txBody>
+                    <a:bodyPr/>
+                    <a:lstStyle/>
+                    <a:p>
+                      <a:r>
+                        <a:rPr sz="1300" b="0">
+                          <a:solidFill>
+                            <a:srgbClr val="5E5E5E"/>
+                          </a:solidFill>
+                          <a:latin typeface="Pretendard Medium"/>
+                        </a:rPr>
+                        <a:t>전부 공개</a:t>
+                      </a:r>
+                    </a:p>
+                  </a:txBody>
+                  <a:tcPr marL="101600" marR="101600" marT="101600" marB="101600" anchor="ctr">
+                    <a:solidFill>
+                      <a:srgbClr val="FFFFFF"/>
+                    </a:solidFill>
+                    <a:lnL w="0">
+                      <a:noFill/>
+                    </a:lnL>
+                    <a:lnR w="0">
+                      <a:noFill/>
+                    </a:lnR>
+                    <a:lnT w="0">
+                      <a:noFill/>
+                    </a:lnT>
+                    <a:lnB w="9525">
+                      <a:solidFill>
+                        <a:srgbClr val="E2E2E2"/>
+                      </a:solidFill>
+                    </a:lnB>
+                  </a:tcPr>
+                </a:tc>
+                <a:tc>
+                  <a:txBody>
+                    <a:bodyPr/>
+                    <a:lstStyle/>
+                    <a:p>
+                      <a:r>
+                        <a:rPr sz="1300" b="0">
+                          <a:solidFill>
+                            <a:srgbClr val="5E5E5E"/>
+                          </a:solidFill>
+                          <a:latin typeface="Pretendard Medium"/>
+                        </a:rPr>
+                        <a:t>국가공간정보포털, TAGO, 한전 요금표</a:t>
+                      </a:r>
+                    </a:p>
+                  </a:txBody>
+                  <a:tcPr marL="101600" marR="101600" marT="101600" marB="101600" anchor="ctr">
+                    <a:solidFill>
+                      <a:srgbClr val="FFFFFF"/>
+                    </a:solidFill>
+                    <a:lnL w="0">
+                      <a:noFill/>
+                    </a:lnL>
+                    <a:lnR w="0">
+                      <a:noFill/>
+                    </a:lnR>
+                    <a:lnT w="0">
+                      <a:noFill/>
+                    </a:lnT>
+                    <a:lnB w="9525">
+                      <a:solidFill>
+                        <a:srgbClr val="E2E2E2"/>
+                      </a:solidFill>
+                    </a:lnB>
+                  </a:tcPr>
+                </a:tc>
+              </a:tr>
+              <a:tr h="635000">
+                <a:tc>
+                  <a:txBody>
+                    <a:bodyPr/>
+                    <a:lstStyle/>
+                    <a:p>
+                      <a:r>
+                        <a:rPr sz="1300" b="1">
+                          <a:solidFill>
+                            <a:srgbClr val="000000"/>
+                          </a:solidFill>
+                          <a:latin typeface="Pretendard"/>
+                        </a:rPr>
+                        <a:t>Vijay (2023)</a:t>
+                      </a:r>
+                    </a:p>
+                  </a:txBody>
+                  <a:tcPr marL="101600" marR="101600" marT="101600" marB="101600" anchor="ctr">
+                    <a:solidFill>
+                      <a:srgbClr val="FFFFFF"/>
+                    </a:solidFill>
+                    <a:lnL w="0">
+                      <a:noFill/>
+                    </a:lnL>
+                    <a:lnR w="0">
+                      <a:noFill/>
+                    </a:lnR>
+                    <a:lnT w="0">
+                      <a:noFill/>
+                    </a:lnT>
+                    <a:lnB w="9525">
+                      <a:solidFill>
+                        <a:srgbClr val="E2E2E2"/>
+                      </a:solidFill>
+                    </a:lnB>
+                  </a:tcPr>
+                </a:tc>
+                <a:tc>
+                  <a:txBody>
+                    <a:bodyPr/>
+                    <a:lstStyle/>
+                    <a:p>
+                      <a:r>
+                        <a:rPr sz="1300" b="0">
+                          <a:solidFill>
+                            <a:srgbClr val="5E5E5E"/>
+                          </a:solidFill>
+                          <a:latin typeface="Pretendard Medium"/>
+                        </a:rPr>
+                        <a:t>GTFS + 승객 오픈데이터 + Google API</a:t>
+                      </a:r>
+                    </a:p>
+                  </a:txBody>
+                  <a:tcPr marL="101600" marR="101600" marT="101600" marB="101600" anchor="ctr">
+                    <a:solidFill>
+                      <a:srgbClr val="FFFFFF"/>
+                    </a:solidFill>
+                    <a:lnL w="0">
+                      <a:noFill/>
+                    </a:lnL>
+                    <a:lnR w="0">
+                      <a:noFill/>
+                    </a:lnR>
+                    <a:lnT w="0">
+                      <a:noFill/>
+                    </a:lnT>
+                    <a:lnB w="9525">
+                      <a:solidFill>
+                        <a:srgbClr val="E2E2E2"/>
+                      </a:solidFill>
+                    </a:lnB>
+                  </a:tcPr>
+                </a:tc>
+                <a:tc>
+                  <a:txBody>
+                    <a:bodyPr/>
+                    <a:lstStyle/>
+                    <a:p>
+                      <a:r>
+                        <a:rPr sz="1300" b="0">
+                          <a:solidFill>
+                            <a:srgbClr val="5E5E5E"/>
+                          </a:solidFill>
+                          <a:latin typeface="Pretendard Medium"/>
+                        </a:rPr>
+                        <a:t>전부 공개</a:t>
+                      </a:r>
+                    </a:p>
+                  </a:txBody>
+                  <a:tcPr marL="101600" marR="101600" marT="101600" marB="101600" anchor="ctr">
+                    <a:solidFill>
+                      <a:srgbClr val="FFFFFF"/>
+                    </a:solidFill>
+                    <a:lnL w="0">
+                      <a:noFill/>
+                    </a:lnL>
+                    <a:lnR w="0">
+                      <a:noFill/>
+                    </a:lnR>
+                    <a:lnT w="0">
+                      <a:noFill/>
+                    </a:lnT>
+                    <a:lnB w="9525">
+                      <a:solidFill>
+                        <a:srgbClr val="E2E2E2"/>
+                      </a:solidFill>
+                    </a:lnB>
+                  </a:tcPr>
+                </a:tc>
+                <a:tc>
+                  <a:txBody>
+                    <a:bodyPr/>
+                    <a:lstStyle/>
+                    <a:p>
+                      <a:r>
+                        <a:rPr sz="1300" b="0">
+                          <a:solidFill>
+                            <a:srgbClr val="5E5E5E"/>
+                          </a:solidFill>
+                          <a:latin typeface="Pretendard Medium"/>
+                        </a:rPr>
+                        <a:t>TAGO GTFS, 교통카드 통계</a:t>
+                      </a:r>
+                    </a:p>
+                  </a:txBody>
+                  <a:tcPr marL="101600" marR="101600" marT="101600" marB="101600" anchor="ctr">
+                    <a:solidFill>
+                      <a:srgbClr val="FFFFFF"/>
+                    </a:solidFill>
+                    <a:lnL w="0">
+                      <a:noFill/>
+                    </a:lnL>
+                    <a:lnR w="0">
+                      <a:noFill/>
+                    </a:lnR>
+                    <a:lnT w="0">
+                      <a:noFill/>
+                    </a:lnT>
+                    <a:lnB w="9525">
+                      <a:solidFill>
+                        <a:srgbClr val="E2E2E2"/>
+                      </a:solidFill>
+                    </a:lnB>
+                  </a:tcPr>
+                </a:tc>
+              </a:tr>
+              <a:tr h="635000">
+                <a:tc>
+                  <a:txBody>
+                    <a:bodyPr/>
+                    <a:lstStyle/>
+                    <a:p>
+                      <a:r>
+                        <a:rPr sz="1300" b="1">
+                          <a:solidFill>
+                            <a:srgbClr val="000000"/>
+                          </a:solidFill>
+                          <a:latin typeface="Pretendard"/>
+                        </a:rPr>
+                        <a:t>Zhou (2024)</a:t>
+                      </a:r>
+                    </a:p>
+                  </a:txBody>
+                  <a:tcPr marL="101600" marR="101600" marT="101600" marB="101600" anchor="ctr">
+                    <a:solidFill>
+                      <a:srgbClr val="FFFFFF"/>
+                    </a:solidFill>
+                    <a:lnL w="0">
+                      <a:noFill/>
+                    </a:lnL>
+                    <a:lnR w="0">
+                      <a:noFill/>
+                    </a:lnR>
+                    <a:lnT w="0">
+                      <a:noFill/>
+                    </a:lnT>
+                    <a:lnB w="9525">
+                      <a:solidFill>
+                        <a:srgbClr val="E2E2E2"/>
+                      </a:solidFill>
+                    </a:lnB>
+                  </a:tcPr>
+                </a:tc>
+                <a:tc>
+                  <a:txBody>
+                    <a:bodyPr/>
+                    <a:lstStyle/>
+                    <a:p>
+                      <a:r>
+                        <a:rPr sz="1300" b="0">
+                          <a:solidFill>
+                            <a:srgbClr val="5E5E5E"/>
+                          </a:solidFill>
+                          <a:latin typeface="Pretendard Medium"/>
+                        </a:rPr>
+                        <a:t>Tower Transit 400대 · 차고지 4</a:t>
+                      </a:r>
+                    </a:p>
+                  </a:txBody>
+                  <a:tcPr marL="101600" marR="101600" marT="101600" marB="101600" anchor="ctr">
+                    <a:solidFill>
+                      <a:srgbClr val="FFFFFF"/>
+                    </a:solidFill>
+                    <a:lnL w="0">
+                      <a:noFill/>
+                    </a:lnL>
+                    <a:lnR w="0">
+                      <a:noFill/>
+                    </a:lnR>
+                    <a:lnT w="0">
+                      <a:noFill/>
+                    </a:lnT>
+                    <a:lnB w="9525">
+                      <a:solidFill>
+                        <a:srgbClr val="E2E2E2"/>
+                      </a:solidFill>
+                    </a:lnB>
+                  </a:tcPr>
+                </a:tc>
+                <a:tc>
+                  <a:txBody>
+                    <a:bodyPr/>
+                    <a:lstStyle/>
+                    <a:p>
+                      <a:r>
+                        <a:rPr sz="1300" b="0">
+                          <a:solidFill>
+                            <a:srgbClr val="5E5E5E"/>
+                          </a:solidFill>
+                          <a:latin typeface="Pretendard Medium"/>
+                        </a:rPr>
+                        <a:t>인스턴스만 (부록 D)</a:t>
+                      </a:r>
+                    </a:p>
+                  </a:txBody>
+                  <a:tcPr marL="101600" marR="101600" marT="101600" marB="101600" anchor="ctr">
+                    <a:solidFill>
+                      <a:srgbClr val="FFFFFF"/>
+                    </a:solidFill>
+                    <a:lnL w="0">
+                      <a:noFill/>
+                    </a:lnL>
+                    <a:lnR w="0">
+                      <a:noFill/>
+                    </a:lnR>
+                    <a:lnT w="0">
+                      <a:noFill/>
+                    </a:lnT>
+                    <a:lnB w="9525">
+                      <a:solidFill>
+                        <a:srgbClr val="E2E2E2"/>
+                      </a:solidFill>
+                    </a:lnB>
+                  </a:tcPr>
+                </a:tc>
+                <a:tc>
+                  <a:txBody>
+                    <a:bodyPr/>
+                    <a:lstStyle/>
+                    <a:p>
+                      <a:r>
+                        <a:rPr sz="1300" b="0">
+                          <a:solidFill>
+                            <a:srgbClr val="5E5E5E"/>
+                          </a:solidFill>
+                          <a:latin typeface="Pretendard Medium"/>
+                        </a:rPr>
+                        <a:t>벤치마크 30세트 그대로 활용</a:t>
+                      </a:r>
+                    </a:p>
+                  </a:txBody>
+                  <a:tcPr marL="101600" marR="101600" marT="101600" marB="101600" anchor="ctr">
+                    <a:solidFill>
+                      <a:srgbClr val="FFFFFF"/>
+                    </a:solidFill>
+                    <a:lnL w="0">
+                      <a:noFill/>
+                    </a:lnL>
+                    <a:lnR w="0">
+                      <a:noFill/>
+                    </a:lnR>
+                    <a:lnT w="0">
+                      <a:noFill/>
+                    </a:lnT>
+                    <a:lnB w="9525">
+                      <a:solidFill>
+                        <a:srgbClr val="E2E2E2"/>
+                      </a:solidFill>
+                    </a:lnB>
+                  </a:tcPr>
+                </a:tc>
+              </a:tr>
+              <a:tr h="635000">
+                <a:tc>
+                  <a:txBody>
+                    <a:bodyPr/>
+                    <a:lstStyle/>
+                    <a:p>
+                      <a:r>
+                        <a:rPr sz="1300" b="1">
+                          <a:solidFill>
+                            <a:srgbClr val="000000"/>
+                          </a:solidFill>
+                          <a:latin typeface="Pretendard"/>
+                        </a:rPr>
+                        <a:t>Liu (2021)</a:t>
+                      </a:r>
+                    </a:p>
+                  </a:txBody>
+                  <a:tcPr marL="101600" marR="101600" marT="101600" marB="101600" anchor="ctr">
+                    <a:solidFill>
+                      <a:srgbClr val="FFFFFF"/>
+                    </a:solidFill>
+                    <a:lnL w="0">
+                      <a:noFill/>
+                    </a:lnL>
+                    <a:lnR w="0">
+                      <a:noFill/>
+                    </a:lnR>
+                    <a:lnT w="0">
+                      <a:noFill/>
+                    </a:lnT>
+                    <a:lnB w="9525">
+                      <a:solidFill>
+                        <a:srgbClr val="E2E2E2"/>
+                      </a:solidFill>
+                    </a:lnB>
+                  </a:tcPr>
+                </a:tc>
+                <a:tc>
+                  <a:txBody>
+                    <a:bodyPr/>
+                    <a:lstStyle/>
+                    <a:p>
+                      <a:r>
+                        <a:rPr sz="1300" b="0">
+                          <a:solidFill>
+                            <a:srgbClr val="5E5E5E"/>
+                          </a:solidFill>
+                          <a:latin typeface="Pretendard Medium"/>
+                        </a:rPr>
+                        <a:t>베이징 스마트카드 + GPS</a:t>
+                      </a:r>
+                    </a:p>
+                  </a:txBody>
+                  <a:tcPr marL="101600" marR="101600" marT="101600" marB="101600" anchor="ctr">
+                    <a:solidFill>
+                      <a:srgbClr val="FFFFFF"/>
+                    </a:solidFill>
+                    <a:lnL w="0">
+                      <a:noFill/>
+                    </a:lnL>
+                    <a:lnR w="0">
+                      <a:noFill/>
+                    </a:lnR>
+                    <a:lnT w="0">
+                      <a:noFill/>
+                    </a:lnT>
+                    <a:lnB w="9525">
+                      <a:solidFill>
+                        <a:srgbClr val="E2E2E2"/>
+                      </a:solidFill>
+                    </a:lnB>
+                  </a:tcPr>
+                </a:tc>
+                <a:tc>
+                  <a:txBody>
+                    <a:bodyPr/>
+                    <a:lstStyle/>
+                    <a:p>
+                      <a:r>
+                        <a:rPr sz="1300" b="0">
+                          <a:solidFill>
+                            <a:srgbClr val="5E5E5E"/>
+                          </a:solidFill>
+                          <a:latin typeface="Pretendard Medium"/>
+                        </a:rPr>
+                        <a:t>비공개</a:t>
+                      </a:r>
+                    </a:p>
+                  </a:txBody>
+                  <a:tcPr marL="101600" marR="101600" marT="101600" marB="101600" anchor="ctr">
+                    <a:solidFill>
+                      <a:srgbClr val="FFFFFF"/>
+                    </a:solidFill>
+                    <a:lnL w="0">
+                      <a:noFill/>
+                    </a:lnL>
+                    <a:lnR w="0">
+                      <a:noFill/>
+                    </a:lnR>
+                    <a:lnT w="0">
+                      <a:noFill/>
+                    </a:lnT>
+                    <a:lnB w="9525">
+                      <a:solidFill>
+                        <a:srgbClr val="E2E2E2"/>
+                      </a:solidFill>
+                    </a:lnB>
+                  </a:tcPr>
+                </a:tc>
+                <a:tc>
+                  <a:txBody>
+                    <a:bodyPr/>
+                    <a:lstStyle/>
+                    <a:p>
+                      <a:r>
+                        <a:rPr sz="1300" b="0">
+                          <a:solidFill>
+                            <a:srgbClr val="5E5E5E"/>
+                          </a:solidFill>
+                          <a:latin typeface="Pretendard Medium"/>
+                        </a:rPr>
+                        <a:t>교통카드 자료, BIS 운행기록</a:t>
+                      </a:r>
+                    </a:p>
+                  </a:txBody>
+                  <a:tcPr marL="101600" marR="101600" marT="101600" marB="101600" anchor="ctr">
+                    <a:solidFill>
+                      <a:srgbClr val="FFFFFF"/>
+                    </a:solidFill>
+                    <a:lnL w="0">
+                      <a:noFill/>
+                    </a:lnL>
+                    <a:lnR w="0">
+                      <a:noFill/>
+                    </a:lnR>
+                    <a:lnT w="0">
+                      <a:noFill/>
+                    </a:lnT>
+                    <a:lnB w="9525">
+                      <a:solidFill>
+                        <a:srgbClr val="E2E2E2"/>
+                      </a:solidFill>
+                    </a:lnB>
+                  </a:tcPr>
+                </a:tc>
+              </a:tr>
+              <a:tr h="635000">
+                <a:tc>
+                  <a:txBody>
+                    <a:bodyPr/>
+                    <a:lstStyle/>
+                    <a:p>
+                      <a:r>
+                        <a:rPr sz="1300" b="1">
+                          <a:solidFill>
+                            <a:srgbClr val="000000"/>
+                          </a:solidFill>
+                          <a:latin typeface="Pretendard"/>
+                        </a:rPr>
+                        <a:t>박지영 외 (2024)</a:t>
+                      </a:r>
+                    </a:p>
+                  </a:txBody>
+                  <a:tcPr marL="101600" marR="101600" marT="101600" marB="101600" anchor="ctr">
+                    <a:solidFill>
+                      <a:srgbClr val="FFFFFF"/>
+                    </a:solidFill>
+                    <a:lnL w="0">
+                      <a:noFill/>
+                    </a:lnL>
+                    <a:lnR w="0">
+                      <a:noFill/>
+                    </a:lnR>
+                    <a:lnT w="0">
+                      <a:noFill/>
+                    </a:lnT>
+                    <a:lnB w="9525">
+                      <a:solidFill>
+                        <a:srgbClr val="E2E2E2"/>
+                      </a:solidFill>
+                    </a:lnB>
+                  </a:tcPr>
+                </a:tc>
+                <a:tc>
+                  <a:txBody>
+                    <a:bodyPr/>
+                    <a:lstStyle/>
+                    <a:p>
+                      <a:r>
+                        <a:rPr sz="1300" b="0">
+                          <a:solidFill>
+                            <a:srgbClr val="5E5E5E"/>
+                          </a:solidFill>
+                          <a:latin typeface="Pretendard Medium"/>
+                        </a:rPr>
+                        <a:t>수원여객 북부차고지 충전 78,928건</a:t>
+                      </a:r>
+                    </a:p>
+                  </a:txBody>
+                  <a:tcPr marL="101600" marR="101600" marT="101600" marB="101600" anchor="ctr">
+                    <a:solidFill>
+                      <a:srgbClr val="FFFFFF"/>
+                    </a:solidFill>
+                    <a:lnL w="0">
+                      <a:noFill/>
+                    </a:lnL>
+                    <a:lnR w="0">
+                      <a:noFill/>
+                    </a:lnR>
+                    <a:lnT w="0">
+                      <a:noFill/>
+                    </a:lnT>
+                    <a:lnB w="9525">
+                      <a:solidFill>
+                        <a:srgbClr val="E2E2E2"/>
+                      </a:solidFill>
+                    </a:lnB>
+                  </a:tcPr>
+                </a:tc>
+                <a:tc>
+                  <a:txBody>
+                    <a:bodyPr/>
+                    <a:lstStyle/>
+                    <a:p>
+                      <a:r>
+                        <a:rPr sz="1300" b="0">
+                          <a:solidFill>
+                            <a:srgbClr val="5E5E5E"/>
+                          </a:solidFill>
+                          <a:latin typeface="Pretendard Medium"/>
+                        </a:rPr>
+                        <a:t>비공개 (컬럼 명세는 공개)</a:t>
+                      </a:r>
+                    </a:p>
+                  </a:txBody>
+                  <a:tcPr marL="101600" marR="101600" marT="101600" marB="101600" anchor="ctr">
+                    <a:solidFill>
+                      <a:srgbClr val="FFFFFF"/>
+                    </a:solidFill>
+                    <a:lnL w="0">
+                      <a:noFill/>
+                    </a:lnL>
+                    <a:lnR w="0">
+                      <a:noFill/>
+                    </a:lnR>
+                    <a:lnT w="0">
+                      <a:noFill/>
+                    </a:lnT>
+                    <a:lnB w="9525">
+                      <a:solidFill>
+                        <a:srgbClr val="E2E2E2"/>
+                      </a:solidFill>
+                    </a:lnB>
+                  </a:tcPr>
+                </a:tc>
+                <a:tc>
+                  <a:txBody>
+                    <a:bodyPr/>
+                    <a:lstStyle/>
+                    <a:p>
+                      <a:r>
+                        <a:rPr sz="1300" b="0">
+                          <a:solidFill>
+                            <a:srgbClr val="5E5E5E"/>
+                          </a:solidFill>
+                          <a:latin typeface="Pretendard Medium"/>
+                        </a:rPr>
+                        <a:t>국내 실측 그 자체 — 표 1이 요청 명세서</a:t>
+                      </a:r>
+                    </a:p>
+                  </a:txBody>
+                  <a:tcPr marL="101600" marR="101600" marT="101600" marB="101600" anchor="ctr">
+                    <a:solidFill>
+                      <a:srgbClr val="FFFFFF"/>
+                    </a:solidFill>
+                    <a:lnL w="0">
+                      <a:noFill/>
+                    </a:lnL>
+                    <a:lnR w="0">
+                      <a:noFill/>
+                    </a:lnR>
+                    <a:lnT w="0">
+                      <a:noFill/>
+                    </a:lnT>
+                    <a:lnB w="9525">
+                      <a:solidFill>
+                        <a:srgbClr val="E2E2E2"/>
+                      </a:solidFill>
+                    </a:lnB>
+                  </a:tcPr>
+                </a:tc>
+              </a:tr>
+            </a:tbl>
+          </a:graphicData>
+        </a:graphic>
+      </p:graphicFrame>
+      <p:sp>
+        <p:nvSpPr>
+          <p:cNvPr id="25" name="Slide Number Placeholder 0"/>
+          <p:cNvSpPr>
+            <a:spLocks noGrp="1"/>
+          </p:cNvSpPr>
+          <p:nvPr>
+            <p:ph type="sldNum" sz="quarter" idx="4294967295"/>
+          </p:nvPr>
+        </p:nvSpPr>
+        <p:spPr>
+          <a:xfrm>
+            <a:off x="10591495" y="6355080"/>
+            <a:ext cx="914400" cy="274320"/>
+          </a:xfrm>
+          <a:prstGeom prst="rect">
+            <a:avLst/>
+          </a:prstGeom>
+          <a:extLst>
+            <a:ext uri="{C572A759-6A51-4108-AA02-DFA0A04FC94B}">
+              <ma14:wrappingTextBoxFlag xmlns:ma14="http://schemas.microsoft.com/office/mac/drawingml/2011/main" val="0"/>
+            </a:ext>
+          </a:extLst>
+        </p:spPr>
+        <p:txBody>
+          <a:bodyPr/>
+          <a:lstStyle>
+            <a:lvl1pPr>
+              <a:defRPr sz="1000">
                 <a:solidFill>
                   <a:srgbClr val="AFAFAF"/>
                 </a:solidFill>
-              </a:rPr>
-              <a:t>4.1  </a:t>
-            </a:r>
-            <a:r>
-              <a:t>운영 변수의 공백</a:t>
-            </a:r>
-          </a:p>
-          <a:p>
-            <a:pPr>
-              <a:spcAft>
-                <a:spcPts val="1000"/>
-              </a:spcAft>
-            </a:pPr>
-            <a:r>
-              <a:rPr>
-                <a:solidFill>
-                  <a:srgbClr val="AFAFAF"/>
-                </a:solidFill>
-              </a:rPr>
-              <a:t>4.2  </a:t>
-            </a:r>
-            <a:r>
-              <a:t>공통 한계 네 가지</a:t>
-            </a:r>
+                <a:latin typeface="Pretendard Medium"/>
+                <a:ea typeface="Pretendard Medium"/>
+                <a:cs typeface="Pretendard Medium"/>
+              </a:defRPr>
+            </a:lvl1pPr>
+          </a:lstStyle>
+          <a:p>
+            <a:pPr algn="r"/>
+            <a:fld id="{F7021451-1387-4CA6-816F-3879F97B5CBC}" type="slidenum">
+              <a:rPr b="0" lang="en-US"/>
+              <a:t>1007</a:t>
+            </a:fld>
+            <a:endParaRPr lang="en-US"/>
           </a:p>
         </p:txBody>
       </p:sp>
@@ -8199,6 +8696,118 @@
 </file>
 
 <file path=ppt/slides/slide16.xml><?xml version="1.0" encoding="utf-8"?>
+<p:sld xmlns:a="http://schemas.openxmlformats.org/drawingml/2006/main" xmlns:p="http://schemas.openxmlformats.org/presentationml/2006/main" xmlns:r="http://schemas.openxmlformats.org/officeDocument/2006/relationships">
+  <p:cSld>
+    <p:spTree>
+      <p:nvGrpSpPr>
+        <p:cNvPr id="1" name=""/>
+        <p:cNvGrpSpPr/>
+        <p:nvPr/>
+      </p:nvGrpSpPr>
+      <p:grpSpPr/>
+      <p:sp>
+        <p:nvSpPr>
+          <p:cNvPr id="2" name="Text Placeholder 1"/>
+          <p:cNvSpPr>
+            <a:spLocks noGrp="1"/>
+          </p:cNvSpPr>
+          <p:nvPr>
+            <p:ph type="body" idx="100"/>
+          </p:nvPr>
+        </p:nvSpPr>
+        <p:spPr/>
+        <p:txBody>
+          <a:bodyPr/>
+          <a:lstStyle/>
+          <a:p>
+            <a:r>
+              <a:t>04</a:t>
+            </a:r>
+          </a:p>
+        </p:txBody>
+      </p:sp>
+      <p:sp>
+        <p:nvSpPr>
+          <p:cNvPr id="3" name="Title 2"/>
+          <p:cNvSpPr>
+            <a:spLocks noGrp="1"/>
+          </p:cNvSpPr>
+          <p:nvPr>
+            <p:ph type="title" idx="101"/>
+          </p:nvPr>
+        </p:nvSpPr>
+        <p:spPr/>
+        <p:txBody>
+          <a:bodyPr/>
+          <a:lstStyle/>
+          <a:p>
+            <a:r>
+              <a:t>현재 연구의 한계</a:t>
+            </a:r>
+          </a:p>
+        </p:txBody>
+      </p:sp>
+      <p:sp>
+        <p:nvSpPr>
+          <p:cNvPr id="4" name="Text Placeholder 3"/>
+          <p:cNvSpPr>
+            <a:spLocks noGrp="1"/>
+          </p:cNvSpPr>
+          <p:nvPr>
+            <p:ph type="body" idx="102"/>
+          </p:nvPr>
+        </p:nvSpPr>
+        <p:spPr/>
+        <p:txBody>
+          <a:bodyPr/>
+          <a:lstStyle/>
+          <a:p>
+            <a:pPr>
+              <a:spcAft>
+                <a:spcPts val="1000"/>
+              </a:spcAft>
+            </a:pPr>
+            <a:r>
+              <a:rPr>
+                <a:solidFill>
+                  <a:srgbClr val="AFAFAF"/>
+                </a:solidFill>
+              </a:rPr>
+              <a:t>4.1  </a:t>
+            </a:r>
+            <a:r>
+              <a:t>운영 변수의 공백</a:t>
+            </a:r>
+          </a:p>
+          <a:p>
+            <a:pPr>
+              <a:spcAft>
+                <a:spcPts val="1000"/>
+              </a:spcAft>
+            </a:pPr>
+            <a:r>
+              <a:rPr>
+                <a:solidFill>
+                  <a:srgbClr val="AFAFAF"/>
+                </a:solidFill>
+              </a:rPr>
+              <a:t>4.2  </a:t>
+            </a:r>
+            <a:r>
+              <a:t>공통 한계 네 가지</a:t>
+            </a:r>
+          </a:p>
+        </p:txBody>
+      </p:sp>
+    </p:spTree>
+  </p:cSld>
+  <p:clrMapOvr>
+    <a:masterClrMapping/>
+  </p:clrMapOvr>
+</p:sld>
+</file>
+
+<file path=ppt/slides/slide17.xml><?xml version="1.0" encoding="utf-8"?>
 <p:sld xmlns:a="http://schemas.openxmlformats.org/drawingml/2006/main" xmlns:p="http://schemas.openxmlformats.org/presentationml/2006/main" xmlns:r="http://schemas.openxmlformats.org/officeDocument/2006/relationships">
   <p:cSld>
     <p:spTree>
@@ -8391,7 +9000,7 @@
 </p:sld>
 </file>
 
-<file path=ppt/slides/slide17.xml><?xml version="1.0" encoding="utf-8"?>
+<file path=ppt/slides/slide18.xml><?xml version="1.0" encoding="utf-8"?>
 <p:sld xmlns:a="http://schemas.openxmlformats.org/drawingml/2006/main" xmlns:p="http://schemas.openxmlformats.org/presentationml/2006/main" xmlns:r="http://schemas.openxmlformats.org/officeDocument/2006/relationships">
   <p:cSld>
     <p:spTree>
@@ -8546,118 +9155,6 @@
               <a:t>1004</a:t>
             </a:fld>
             <a:endParaRPr lang="en-US"/>
-          </a:p>
-        </p:txBody>
-      </p:sp>
-    </p:spTree>
-  </p:cSld>
-  <p:clrMapOvr>
-    <a:masterClrMapping/>
-  </p:clrMapOvr>
-</p:sld>
-</file>
-
-<file path=ppt/slides/slide18.xml><?xml version="1.0" encoding="utf-8"?>
-<p:sld xmlns:a="http://schemas.openxmlformats.org/drawingml/2006/main" xmlns:p="http://schemas.openxmlformats.org/presentationml/2006/main" xmlns:r="http://schemas.openxmlformats.org/officeDocument/2006/relationships">
-  <p:cSld>
-    <p:spTree>
-      <p:nvGrpSpPr>
-        <p:cNvPr id="1" name=""/>
-        <p:cNvGrpSpPr/>
-        <p:nvPr/>
-      </p:nvGrpSpPr>
-      <p:grpSpPr/>
-      <p:sp>
-        <p:nvSpPr>
-          <p:cNvPr id="2" name="Text Placeholder 1"/>
-          <p:cNvSpPr>
-            <a:spLocks noGrp="1"/>
-          </p:cNvSpPr>
-          <p:nvPr>
-            <p:ph type="body" idx="100"/>
-          </p:nvPr>
-        </p:nvSpPr>
-        <p:spPr/>
-        <p:txBody>
-          <a:bodyPr/>
-          <a:lstStyle/>
-          <a:p>
-            <a:r>
-              <a:t>05</a:t>
-            </a:r>
-          </a:p>
-        </p:txBody>
-      </p:sp>
-      <p:sp>
-        <p:nvSpPr>
-          <p:cNvPr id="3" name="Title 2"/>
-          <p:cNvSpPr>
-            <a:spLocks noGrp="1"/>
-          </p:cNvSpPr>
-          <p:nvPr>
-            <p:ph type="title" idx="101"/>
-          </p:nvPr>
-        </p:nvSpPr>
-        <p:spPr/>
-        <p:txBody>
-          <a:bodyPr/>
-          <a:lstStyle/>
-          <a:p>
-            <a:r>
-              <a:t>앞으로 필요한 것</a:t>
-            </a:r>
-          </a:p>
-        </p:txBody>
-      </p:sp>
-      <p:sp>
-        <p:nvSpPr>
-          <p:cNvPr id="4" name="Text Placeholder 3"/>
-          <p:cNvSpPr>
-            <a:spLocks noGrp="1"/>
-          </p:cNvSpPr>
-          <p:nvPr>
-            <p:ph type="body" idx="102"/>
-          </p:nvPr>
-        </p:nvSpPr>
-        <p:spPr/>
-        <p:txBody>
-          <a:bodyPr/>
-          <a:lstStyle/>
-          <a:p>
-            <a:pPr>
-              <a:spcAft>
-                <a:spcPts val="1000"/>
-              </a:spcAft>
-            </a:pPr>
-            <a:r>
-              <a:rPr>
-                <a:solidFill>
-                  <a:srgbClr val="AFAFAF"/>
-                </a:solidFill>
-              </a:rPr>
-              <a:t>5.1  </a:t>
-            </a:r>
-            <a:r>
-              <a:t>예비 실행 — DTUMOS</a:t>
-            </a:r>
-          </a:p>
-          <a:p>
-            <a:pPr>
-              <a:spcAft>
-                <a:spcPts val="1000"/>
-              </a:spcAft>
-            </a:pPr>
-            <a:r>
-              <a:rPr>
-                <a:solidFill>
-                  <a:srgbClr val="AFAFAF"/>
-                </a:solidFill>
-              </a:rPr>
-              <a:t>5.2  </a:t>
-            </a:r>
-            <a:r>
-              <a:t>다음 단계</a:t>
-            </a:r>
           </a:p>
         </p:txBody>
       </p:sp>
@@ -8681,12 +9178,12 @@
       <p:grpSpPr/>
       <p:sp>
         <p:nvSpPr>
-          <p:cNvPr id="2" name="Title 1"/>
+          <p:cNvPr id="2" name="Text Placeholder 1"/>
           <p:cNvSpPr>
             <a:spLocks noGrp="1"/>
           </p:cNvSpPr>
           <p:nvPr>
-            <p:ph type="title" idx="100"/>
+            <p:ph type="body" idx="100"/>
           </p:nvPr>
         </p:nvSpPr>
         <p:spPr/>
@@ -8695,19 +9192,19 @@
           <a:lstStyle/>
           <a:p>
             <a:r>
-              <a:t>5.1 예비 실행 — DTUMOS</a:t>
-            </a:r>
-          </a:p>
-        </p:txBody>
-      </p:sp>
-      <p:sp>
-        <p:nvSpPr>
-          <p:cNvPr id="3" name="Text Placeholder 2"/>
+              <a:t>05</a:t>
+            </a:r>
+          </a:p>
+        </p:txBody>
+      </p:sp>
+      <p:sp>
+        <p:nvSpPr>
+          <p:cNvPr id="3" name="Title 2"/>
           <p:cNvSpPr>
             <a:spLocks noGrp="1"/>
           </p:cNvSpPr>
           <p:nvPr>
-            <p:ph type="body" idx="101"/>
+            <p:ph type="title" idx="101"/>
           </p:nvPr>
         </p:nvSpPr>
         <p:spPr/>
@@ -8716,7 +9213,7 @@
           <a:lstStyle/>
           <a:p>
             <a:r>
-              <a:t>5. 앞으로 필요한 것</a:t>
+              <a:t>앞으로 필요한 것</a:t>
             </a:r>
           </a:p>
         </p:txBody>
@@ -8736,701 +9233,40 @@
           <a:bodyPr/>
           <a:lstStyle/>
           <a:p>
-            <a:pPr/>
-            <a:r>
-              <a:t>서울 택시 실측 수요 투입</a:t>
-            </a:r>
-          </a:p>
-          <a:p>
-            <a:pPr/>
-            <a:r>
-              <a:t>2018-04-18 18–20시</a:t>
-            </a:r>
-          </a:p>
-          <a:p>
-            <a:pPr/>
-            <a:r>
-              <a:t>규모 세 단계로 실행</a:t>
-            </a:r>
-          </a:p>
-          <a:p>
-            <a:pPr/>
-            <a:r>
-              <a:t>충전 제약은 아직 없음</a:t>
-            </a:r>
-          </a:p>
-        </p:txBody>
-      </p:sp>
-      <p:sp>
-        <p:nvSpPr>
-          <p:cNvPr id="5" name="Text Placeholder 4"/>
-          <p:cNvSpPr>
-            <a:spLocks noGrp="1"/>
-          </p:cNvSpPr>
-          <p:nvPr>
-            <p:ph type="body" idx="103"/>
-          </p:nvPr>
-        </p:nvSpPr>
-        <p:spPr/>
-        <p:txBody>
-          <a:bodyPr/>
-          <a:lstStyle/>
-          <a:p>
-            <a:r>
-              <a:t>표 7. DTUMOS 예비 실행 3회차 (서울, 18–20시)</a:t>
-            </a:r>
-          </a:p>
-        </p:txBody>
-      </p:sp>
-      <p:graphicFrame>
-        <p:nvGraphicFramePr>
-          <p:cNvPr id="6" name="Table Placeholder 5"/>
-          <p:cNvGraphicFramePr>
-            <a:graphicFrameLocks noGrp="1"/>
-          </p:cNvGraphicFramePr>
-          <p:nvPr>
-            <p:ph type="tbl" idx="104"/>
-          </p:nvPr>
-        </p:nvGraphicFramePr>
-        <p:xfrm>
-          <a:off x="4937760" y="1828800"/>
-          <a:ext cx="6565392" cy="2311400"/>
-        </p:xfrm>
-        <a:graphic>
-          <a:graphicData uri="http://schemas.openxmlformats.org/drawingml/2006/table">
-            <a:tbl>
-              <a:tblPr firstRow="0" bandRow="0" firstCol="0" lastRow="0" lastCol="0" bandCol="0"/>
-              <a:tblGrid>
-                <a:gridCol w="1641348"/>
-                <a:gridCol w="1641348"/>
-                <a:gridCol w="1641348"/>
-                <a:gridCol w="1641348"/>
-              </a:tblGrid>
-              <a:tr h="406400">
-                <a:tc>
-                  <a:txBody>
-                    <a:bodyPr/>
-                    <a:lstStyle/>
-                    <a:p>
-                      <a:r>
-                        <a:rPr sz="1300" b="0">
-                          <a:solidFill>
-                            <a:srgbClr val="FFFFFF"/>
-                          </a:solidFill>
-                          <a:latin typeface="Pretendard Medium"/>
-                        </a:rPr>
-                        <a:t>차량</a:t>
-                      </a:r>
-                    </a:p>
-                  </a:txBody>
-                  <a:tcPr marL="101600" marR="101600" marT="76200" marB="76200" anchor="ctr">
-                    <a:solidFill>
-                      <a:srgbClr val="000000"/>
-                    </a:solidFill>
-                    <a:lnL w="0">
-                      <a:noFill/>
-                    </a:lnL>
-                    <a:lnR w="0">
-                      <a:noFill/>
-                    </a:lnR>
-                    <a:lnT w="0">
-                      <a:noFill/>
-                    </a:lnT>
-                    <a:lnB w="0">
-                      <a:noFill/>
-                    </a:lnB>
-                  </a:tcPr>
-                </a:tc>
-                <a:tc>
-                  <a:txBody>
-                    <a:bodyPr/>
-                    <a:lstStyle/>
-                    <a:p>
-                      <a:r>
-                        <a:rPr sz="1300" b="0">
-                          <a:solidFill>
-                            <a:srgbClr val="FFFFFF"/>
-                          </a:solidFill>
-                          <a:latin typeface="Pretendard Medium"/>
-                        </a:rPr>
-                        <a:t>수요</a:t>
-                      </a:r>
-                    </a:p>
-                  </a:txBody>
-                  <a:tcPr marL="101600" marR="101600" marT="76200" marB="76200" anchor="ctr">
-                    <a:solidFill>
-                      <a:srgbClr val="000000"/>
-                    </a:solidFill>
-                    <a:lnL w="0">
-                      <a:noFill/>
-                    </a:lnL>
-                    <a:lnR w="0">
-                      <a:noFill/>
-                    </a:lnR>
-                    <a:lnT w="0">
-                      <a:noFill/>
-                    </a:lnT>
-                    <a:lnB w="0">
-                      <a:noFill/>
-                    </a:lnB>
-                  </a:tcPr>
-                </a:tc>
-                <a:tc>
-                  <a:txBody>
-                    <a:bodyPr/>
-                    <a:lstStyle/>
-                    <a:p>
-                      <a:r>
-                        <a:rPr sz="1300" b="0">
-                          <a:solidFill>
-                            <a:srgbClr val="FFFFFF"/>
-                          </a:solidFill>
-                          <a:latin typeface="Pretendard Medium"/>
-                        </a:rPr>
-                        <a:t>서비스율</a:t>
-                      </a:r>
-                    </a:p>
-                  </a:txBody>
-                  <a:tcPr marL="101600" marR="101600" marT="76200" marB="76200" anchor="ctr">
-                    <a:solidFill>
-                      <a:srgbClr val="000000"/>
-                    </a:solidFill>
-                    <a:lnL w="0">
-                      <a:noFill/>
-                    </a:lnL>
-                    <a:lnR w="0">
-                      <a:noFill/>
-                    </a:lnR>
-                    <a:lnT w="0">
-                      <a:noFill/>
-                    </a:lnT>
-                    <a:lnB w="0">
-                      <a:noFill/>
-                    </a:lnB>
-                  </a:tcPr>
-                </a:tc>
-                <a:tc>
-                  <a:txBody>
-                    <a:bodyPr/>
-                    <a:lstStyle/>
-                    <a:p>
-                      <a:r>
-                        <a:rPr sz="1300" b="0">
-                          <a:solidFill>
-                            <a:srgbClr val="FFFFFF"/>
-                          </a:solidFill>
-                          <a:latin typeface="Pretendard Medium"/>
-                        </a:rPr>
-                        <a:t>평균 대기</a:t>
-                      </a:r>
-                    </a:p>
-                  </a:txBody>
-                  <a:tcPr marL="101600" marR="101600" marT="76200" marB="76200" anchor="ctr">
-                    <a:solidFill>
-                      <a:srgbClr val="000000"/>
-                    </a:solidFill>
-                    <a:lnL w="0">
-                      <a:noFill/>
-                    </a:lnL>
-                    <a:lnR w="0">
-                      <a:noFill/>
-                    </a:lnR>
-                    <a:lnT w="0">
-                      <a:noFill/>
-                    </a:lnT>
-                    <a:lnB w="0">
-                      <a:noFill/>
-                    </a:lnB>
-                  </a:tcPr>
-                </a:tc>
-              </a:tr>
-              <a:tr h="635000">
-                <a:tc>
-                  <a:txBody>
-                    <a:bodyPr/>
-                    <a:lstStyle/>
-                    <a:p>
-                      <a:r>
-                        <a:rPr sz="1300" b="1">
-                          <a:solidFill>
-                            <a:srgbClr val="000000"/>
-                          </a:solidFill>
-                          <a:latin typeface="Pretendard"/>
-                        </a:rPr>
-                        <a:t>300</a:t>
-                      </a:r>
-                    </a:p>
-                  </a:txBody>
-                  <a:tcPr marL="101600" marR="101600" marT="101600" marB="101600" anchor="ctr">
-                    <a:solidFill>
-                      <a:srgbClr val="FFFFFF"/>
-                    </a:solidFill>
-                    <a:lnL w="0">
-                      <a:noFill/>
-                    </a:lnL>
-                    <a:lnR w="0">
-                      <a:noFill/>
-                    </a:lnR>
-                    <a:lnT w="0">
-                      <a:noFill/>
-                    </a:lnT>
-                    <a:lnB w="9525">
-                      <a:solidFill>
-                        <a:srgbClr val="E2E2E2"/>
-                      </a:solidFill>
-                    </a:lnB>
-                  </a:tcPr>
-                </a:tc>
-                <a:tc>
-                  <a:txBody>
-                    <a:bodyPr/>
-                    <a:lstStyle/>
-                    <a:p>
-                      <a:r>
-                        <a:rPr sz="1300" b="0">
-                          <a:solidFill>
-                            <a:srgbClr val="5E5E5E"/>
-                          </a:solidFill>
-                          <a:latin typeface="Pretendard Medium"/>
-                        </a:rPr>
-                        <a:t>3,000</a:t>
-                      </a:r>
-                    </a:p>
-                  </a:txBody>
-                  <a:tcPr marL="101600" marR="101600" marT="101600" marB="101600" anchor="ctr">
-                    <a:solidFill>
-                      <a:srgbClr val="FFFFFF"/>
-                    </a:solidFill>
-                    <a:lnL w="0">
-                      <a:noFill/>
-                    </a:lnL>
-                    <a:lnR w="0">
-                      <a:noFill/>
-                    </a:lnR>
-                    <a:lnT w="0">
-                      <a:noFill/>
-                    </a:lnT>
-                    <a:lnB w="9525">
-                      <a:solidFill>
-                        <a:srgbClr val="E2E2E2"/>
-                      </a:solidFill>
-                    </a:lnB>
-                  </a:tcPr>
-                </a:tc>
-                <a:tc>
-                  <a:txBody>
-                    <a:bodyPr/>
-                    <a:lstStyle/>
-                    <a:p>
-                      <a:r>
-                        <a:rPr sz="1300" b="0">
-                          <a:solidFill>
-                            <a:srgbClr val="5E5E5E"/>
-                          </a:solidFill>
-                          <a:latin typeface="Pretendard Medium"/>
-                        </a:rPr>
-                        <a:t>79.5%</a:t>
-                      </a:r>
-                    </a:p>
-                  </a:txBody>
-                  <a:tcPr marL="101600" marR="101600" marT="101600" marB="101600" anchor="ctr">
-                    <a:solidFill>
-                      <a:srgbClr val="FFFFFF"/>
-                    </a:solidFill>
-                    <a:lnL w="0">
-                      <a:noFill/>
-                    </a:lnL>
-                    <a:lnR w="0">
-                      <a:noFill/>
-                    </a:lnR>
-                    <a:lnT w="0">
-                      <a:noFill/>
-                    </a:lnT>
-                    <a:lnB w="9525">
-                      <a:solidFill>
-                        <a:srgbClr val="E2E2E2"/>
-                      </a:solidFill>
-                    </a:lnB>
-                  </a:tcPr>
-                </a:tc>
-                <a:tc>
-                  <a:txBody>
-                    <a:bodyPr/>
-                    <a:lstStyle/>
-                    <a:p>
-                      <a:r>
-                        <a:rPr sz="1300" b="0">
-                          <a:solidFill>
-                            <a:srgbClr val="5E5E5E"/>
-                          </a:solidFill>
-                          <a:latin typeface="Pretendard Medium"/>
-                        </a:rPr>
-                        <a:t>5.7분</a:t>
-                      </a:r>
-                    </a:p>
-                  </a:txBody>
-                  <a:tcPr marL="101600" marR="101600" marT="101600" marB="101600" anchor="ctr">
-                    <a:solidFill>
-                      <a:srgbClr val="FFFFFF"/>
-                    </a:solidFill>
-                    <a:lnL w="0">
-                      <a:noFill/>
-                    </a:lnL>
-                    <a:lnR w="0">
-                      <a:noFill/>
-                    </a:lnR>
-                    <a:lnT w="0">
-                      <a:noFill/>
-                    </a:lnT>
-                    <a:lnB w="9525">
-                      <a:solidFill>
-                        <a:srgbClr val="E2E2E2"/>
-                      </a:solidFill>
-                    </a:lnB>
-                  </a:tcPr>
-                </a:tc>
-              </a:tr>
-              <a:tr h="635000">
-                <a:tc>
-                  <a:txBody>
-                    <a:bodyPr/>
-                    <a:lstStyle/>
-                    <a:p>
-                      <a:r>
-                        <a:rPr sz="1300" b="1">
-                          <a:solidFill>
-                            <a:srgbClr val="000000"/>
-                          </a:solidFill>
-                          <a:latin typeface="Pretendard"/>
-                        </a:rPr>
-                        <a:t>1,200</a:t>
-                      </a:r>
-                    </a:p>
-                  </a:txBody>
-                  <a:tcPr marL="101600" marR="101600" marT="101600" marB="101600" anchor="ctr">
-                    <a:solidFill>
-                      <a:srgbClr val="FFFFFF"/>
-                    </a:solidFill>
-                    <a:lnL w="0">
-                      <a:noFill/>
-                    </a:lnL>
-                    <a:lnR w="0">
-                      <a:noFill/>
-                    </a:lnR>
-                    <a:lnT w="0">
-                      <a:noFill/>
-                    </a:lnT>
-                    <a:lnB w="9525">
-                      <a:solidFill>
-                        <a:srgbClr val="E2E2E2"/>
-                      </a:solidFill>
-                    </a:lnB>
-                  </a:tcPr>
-                </a:tc>
-                <a:tc>
-                  <a:txBody>
-                    <a:bodyPr/>
-                    <a:lstStyle/>
-                    <a:p>
-                      <a:r>
-                        <a:rPr sz="1300" b="0">
-                          <a:solidFill>
-                            <a:srgbClr val="5E5E5E"/>
-                          </a:solidFill>
-                          <a:latin typeface="Pretendard Medium"/>
-                        </a:rPr>
-                        <a:t>12,000</a:t>
-                      </a:r>
-                    </a:p>
-                  </a:txBody>
-                  <a:tcPr marL="101600" marR="101600" marT="101600" marB="101600" anchor="ctr">
-                    <a:solidFill>
-                      <a:srgbClr val="FFFFFF"/>
-                    </a:solidFill>
-                    <a:lnL w="0">
-                      <a:noFill/>
-                    </a:lnL>
-                    <a:lnR w="0">
-                      <a:noFill/>
-                    </a:lnR>
-                    <a:lnT w="0">
-                      <a:noFill/>
-                    </a:lnT>
-                    <a:lnB w="9525">
-                      <a:solidFill>
-                        <a:srgbClr val="E2E2E2"/>
-                      </a:solidFill>
-                    </a:lnB>
-                  </a:tcPr>
-                </a:tc>
-                <a:tc>
-                  <a:txBody>
-                    <a:bodyPr/>
-                    <a:lstStyle/>
-                    <a:p>
-                      <a:r>
-                        <a:rPr sz="1300" b="0">
-                          <a:solidFill>
-                            <a:srgbClr val="5E5E5E"/>
-                          </a:solidFill>
-                          <a:latin typeface="Pretendard Medium"/>
-                        </a:rPr>
-                        <a:t>88.1%</a:t>
-                      </a:r>
-                    </a:p>
-                  </a:txBody>
-                  <a:tcPr marL="101600" marR="101600" marT="101600" marB="101600" anchor="ctr">
-                    <a:solidFill>
-                      <a:srgbClr val="FFFFFF"/>
-                    </a:solidFill>
-                    <a:lnL w="0">
-                      <a:noFill/>
-                    </a:lnL>
-                    <a:lnR w="0">
-                      <a:noFill/>
-                    </a:lnR>
-                    <a:lnT w="0">
-                      <a:noFill/>
-                    </a:lnT>
-                    <a:lnB w="9525">
-                      <a:solidFill>
-                        <a:srgbClr val="E2E2E2"/>
-                      </a:solidFill>
-                    </a:lnB>
-                  </a:tcPr>
-                </a:tc>
-                <a:tc>
-                  <a:txBody>
-                    <a:bodyPr/>
-                    <a:lstStyle/>
-                    <a:p>
-                      <a:r>
-                        <a:rPr sz="1300" b="0">
-                          <a:solidFill>
-                            <a:srgbClr val="5E5E5E"/>
-                          </a:solidFill>
-                          <a:latin typeface="Pretendard Medium"/>
-                        </a:rPr>
-                        <a:t>4.0분</a:t>
-                      </a:r>
-                    </a:p>
-                  </a:txBody>
-                  <a:tcPr marL="101600" marR="101600" marT="101600" marB="101600" anchor="ctr">
-                    <a:solidFill>
-                      <a:srgbClr val="FFFFFF"/>
-                    </a:solidFill>
-                    <a:lnL w="0">
-                      <a:noFill/>
-                    </a:lnL>
-                    <a:lnR w="0">
-                      <a:noFill/>
-                    </a:lnR>
-                    <a:lnT w="0">
-                      <a:noFill/>
-                    </a:lnT>
-                    <a:lnB w="9525">
-                      <a:solidFill>
-                        <a:srgbClr val="E2E2E2"/>
-                      </a:solidFill>
-                    </a:lnB>
-                  </a:tcPr>
-                </a:tc>
-              </a:tr>
-              <a:tr h="635000">
-                <a:tc>
-                  <a:txBody>
-                    <a:bodyPr/>
-                    <a:lstStyle/>
-                    <a:p>
-                      <a:r>
-                        <a:rPr sz="1300" b="1">
-                          <a:solidFill>
-                            <a:srgbClr val="000000"/>
-                          </a:solidFill>
-                          <a:latin typeface="Pretendard"/>
-                        </a:rPr>
-                        <a:t>6,000</a:t>
-                      </a:r>
-                    </a:p>
-                  </a:txBody>
-                  <a:tcPr marL="101600" marR="101600" marT="101600" marB="101600" anchor="ctr">
-                    <a:solidFill>
-                      <a:srgbClr val="FFFFFF"/>
-                    </a:solidFill>
-                    <a:lnL w="0">
-                      <a:noFill/>
-                    </a:lnL>
-                    <a:lnR w="0">
-                      <a:noFill/>
-                    </a:lnR>
-                    <a:lnT w="0">
-                      <a:noFill/>
-                    </a:lnT>
-                    <a:lnB w="9525">
-                      <a:solidFill>
-                        <a:srgbClr val="E2E2E2"/>
-                      </a:solidFill>
-                    </a:lnB>
-                  </a:tcPr>
-                </a:tc>
-                <a:tc>
-                  <a:txBody>
-                    <a:bodyPr/>
-                    <a:lstStyle/>
-                    <a:p>
-                      <a:r>
-                        <a:rPr sz="1300" b="0">
-                          <a:solidFill>
-                            <a:srgbClr val="5E5E5E"/>
-                          </a:solidFill>
-                          <a:latin typeface="Pretendard Medium"/>
-                        </a:rPr>
-                        <a:t>90,872</a:t>
-                      </a:r>
-                    </a:p>
-                  </a:txBody>
-                  <a:tcPr marL="101600" marR="101600" marT="101600" marB="101600" anchor="ctr">
-                    <a:solidFill>
-                      <a:srgbClr val="FFFFFF"/>
-                    </a:solidFill>
-                    <a:lnL w="0">
-                      <a:noFill/>
-                    </a:lnL>
-                    <a:lnR w="0">
-                      <a:noFill/>
-                    </a:lnR>
-                    <a:lnT w="0">
-                      <a:noFill/>
-                    </a:lnT>
-                    <a:lnB w="9525">
-                      <a:solidFill>
-                        <a:srgbClr val="E2E2E2"/>
-                      </a:solidFill>
-                    </a:lnB>
-                  </a:tcPr>
-                </a:tc>
-                <a:tc>
-                  <a:txBody>
-                    <a:bodyPr/>
-                    <a:lstStyle/>
-                    <a:p>
-                      <a:r>
-                        <a:rPr sz="1300" b="0">
-                          <a:solidFill>
-                            <a:srgbClr val="5E5E5E"/>
-                          </a:solidFill>
-                          <a:latin typeface="Pretendard Medium"/>
-                        </a:rPr>
-                        <a:t>69.4%</a:t>
-                      </a:r>
-                    </a:p>
-                  </a:txBody>
-                  <a:tcPr marL="101600" marR="101600" marT="101600" marB="101600" anchor="ctr">
-                    <a:solidFill>
-                      <a:srgbClr val="FFFFFF"/>
-                    </a:solidFill>
-                    <a:lnL w="0">
-                      <a:noFill/>
-                    </a:lnL>
-                    <a:lnR w="0">
-                      <a:noFill/>
-                    </a:lnR>
-                    <a:lnT w="0">
-                      <a:noFill/>
-                    </a:lnT>
-                    <a:lnB w="9525">
-                      <a:solidFill>
-                        <a:srgbClr val="E2E2E2"/>
-                      </a:solidFill>
-                    </a:lnB>
-                  </a:tcPr>
-                </a:tc>
-                <a:tc>
-                  <a:txBody>
-                    <a:bodyPr/>
-                    <a:lstStyle/>
-                    <a:p>
-                      <a:r>
-                        <a:rPr sz="1300" b="0">
-                          <a:solidFill>
-                            <a:srgbClr val="5E5E5E"/>
-                          </a:solidFill>
-                          <a:latin typeface="Pretendard Medium"/>
-                        </a:rPr>
-                        <a:t>2.7분</a:t>
-                      </a:r>
-                    </a:p>
-                  </a:txBody>
-                  <a:tcPr marL="101600" marR="101600" marT="101600" marB="101600" anchor="ctr">
-                    <a:solidFill>
-                      <a:srgbClr val="FFFFFF"/>
-                    </a:solidFill>
-                    <a:lnL w="0">
-                      <a:noFill/>
-                    </a:lnL>
-                    <a:lnR w="0">
-                      <a:noFill/>
-                    </a:lnR>
-                    <a:lnT w="0">
-                      <a:noFill/>
-                    </a:lnT>
-                    <a:lnB w="9525">
-                      <a:solidFill>
-                        <a:srgbClr val="E2E2E2"/>
-                      </a:solidFill>
-                    </a:lnB>
-                  </a:tcPr>
-                </a:tc>
-              </a:tr>
-            </a:tbl>
-          </a:graphicData>
-        </a:graphic>
-      </p:graphicFrame>
-      <p:sp>
-        <p:nvSpPr>
-          <p:cNvPr id="25" name="Slide Number Placeholder 0"/>
-          <p:cNvSpPr>
-            <a:spLocks noGrp="1"/>
-          </p:cNvSpPr>
-          <p:nvPr>
-            <p:ph type="sldNum" sz="quarter" idx="4294967295"/>
-          </p:nvPr>
-        </p:nvSpPr>
-        <p:spPr>
-          <a:xfrm>
-            <a:off x="10591495" y="6355080"/>
-            <a:ext cx="914400" cy="274320"/>
-          </a:xfrm>
-          <a:prstGeom prst="rect">
-            <a:avLst/>
-          </a:prstGeom>
-          <a:extLst>
-            <a:ext uri="{C572A759-6A51-4108-AA02-DFA0A04FC94B}">
-              <ma14:wrappingTextBoxFlag xmlns:ma14="http://schemas.microsoft.com/office/mac/drawingml/2011/main" val="0"/>
-            </a:ext>
-          </a:extLst>
-        </p:spPr>
-        <p:txBody>
-          <a:bodyPr/>
-          <a:lstStyle>
-            <a:lvl1pPr>
-              <a:defRPr sz="1000">
+            <a:pPr>
+              <a:spcAft>
+                <a:spcPts val="1000"/>
+              </a:spcAft>
+            </a:pPr>
+            <a:r>
+              <a:rPr>
                 <a:solidFill>
                   <a:srgbClr val="AFAFAF"/>
                 </a:solidFill>
-                <a:latin typeface="Pretendard Medium"/>
-                <a:ea typeface="Pretendard Medium"/>
-                <a:cs typeface="Pretendard Medium"/>
-              </a:defRPr>
-            </a:lvl1pPr>
-          </a:lstStyle>
-          <a:p>
-            <a:pPr algn="r"/>
-            <a:fld id="{F7021451-1387-4CA6-816F-3879F97B5CBC}" type="slidenum">
-              <a:rPr b="0" lang="en-US"/>
-              <a:t>1008</a:t>
-            </a:fld>
-            <a:endParaRPr lang="en-US"/>
+              </a:rPr>
+              <a:t>5.1  </a:t>
+            </a:r>
+            <a:r>
+              <a:t>예비 실행 — DTUMOS</a:t>
+            </a:r>
+          </a:p>
+          <a:p>
+            <a:pPr>
+              <a:spcAft>
+                <a:spcPts val="1000"/>
+              </a:spcAft>
+            </a:pPr>
+            <a:r>
+              <a:rPr>
+                <a:solidFill>
+                  <a:srgbClr val="AFAFAF"/>
+                </a:solidFill>
+              </a:rPr>
+              <a:t>5.2  </a:t>
+            </a:r>
+            <a:r>
+              <a:t>다음 단계</a:t>
+            </a:r>
           </a:p>
         </p:txBody>
       </p:sp>
@@ -9822,7 +9658,7 @@
                           </a:solidFill>
                           <a:latin typeface="Pretendard Medium"/>
                         </a:rPr>
-                        <a:t>3.1 합의된 결과 세 가지  ·  3.2 데이터와 국내 재현 가능성</a:t>
+                        <a:t>3.1 합의된 결과 세 가지  ·  3.2 국내 실측 — 수원여객 차고지  ·  3.3 데이터와 국내 재현 가능성</a:t>
                       </a:r>
                     </a:p>
                   </a:txBody>
@@ -10153,7 +9989,7 @@
           <a:lstStyle/>
           <a:p>
             <a:r>
-              <a:t>5.2 다음 단계</a:t>
+              <a:t>5.1 예비 실행 — DTUMOS</a:t>
             </a:r>
           </a:p>
         </p:txBody>
@@ -10196,47 +10032,654 @@
           <a:p>
             <a:pPr/>
             <a:r>
-              <a:t>결정변수 확장: 충전소 입지 + 배차·시각표·운전자 휴게 동시</a:t>
-            </a:r>
-          </a:p>
-          <a:p>
-            <a:pPr lvl="1"/>
-            <a:r>
-              <a:t>Ashkezari (2024)가 방향까지 제시, 수행 사례 없음</a:t>
+              <a:t>서울 택시 실측 수요 투입</a:t>
             </a:r>
           </a:p>
           <a:p>
             <a:pPr/>
             <a:r>
-              <a:t>해상도 전환: 시간당 집계 대수 → 개별 차량 운행표</a:t>
-            </a:r>
-          </a:p>
-          <a:p>
-            <a:pPr lvl="1"/>
-            <a:r>
-              <a:t>Liu (2021)의 flow 수준을 block 수준으로</a:t>
+              <a:t>2018-04-18 18–20시</a:t>
             </a:r>
           </a:p>
           <a:p>
             <a:pPr/>
             <a:r>
-              <a:t>시뮬레이터: DTUMOS에 배터리·충전소 모델 부재 → 구현 대상</a:t>
-            </a:r>
-          </a:p>
-          <a:p>
-            <a:pPr lvl="1"/>
-            <a:r>
-              <a:t>충전 지연 → 배차 교란의 되먹임은 최적화보다 시뮬레이션에 적합</a:t>
+              <a:t>규모 세 단계로 실행</a:t>
             </a:r>
           </a:p>
           <a:p>
             <a:pPr/>
             <a:r>
-              <a:t>검토 잔여: 미검토 4편 · 국내 문헌 추가 검색 · 버스 GTFS 확보</a:t>
-            </a:r>
-          </a:p>
-        </p:txBody>
-      </p:sp>
+              <a:t>충전 제약은 아직 없음</a:t>
+            </a:r>
+          </a:p>
+        </p:txBody>
+      </p:sp>
+      <p:sp>
+        <p:nvSpPr>
+          <p:cNvPr id="5" name="Text Placeholder 4"/>
+          <p:cNvSpPr>
+            <a:spLocks noGrp="1"/>
+          </p:cNvSpPr>
+          <p:nvPr>
+            <p:ph type="body" idx="103"/>
+          </p:nvPr>
+        </p:nvSpPr>
+        <p:spPr/>
+        <p:txBody>
+          <a:bodyPr/>
+          <a:lstStyle/>
+          <a:p>
+            <a:r>
+              <a:t>표 8. DTUMOS 예비 실행 3회차 (서울, 18–20시)</a:t>
+            </a:r>
+          </a:p>
+        </p:txBody>
+      </p:sp>
+      <p:graphicFrame>
+        <p:nvGraphicFramePr>
+          <p:cNvPr id="6" name="Table Placeholder 5"/>
+          <p:cNvGraphicFramePr>
+            <a:graphicFrameLocks noGrp="1"/>
+          </p:cNvGraphicFramePr>
+          <p:nvPr>
+            <p:ph type="tbl" idx="104"/>
+          </p:nvPr>
+        </p:nvGraphicFramePr>
+        <p:xfrm>
+          <a:off x="4937760" y="1828800"/>
+          <a:ext cx="6565392" cy="2311400"/>
+        </p:xfrm>
+        <a:graphic>
+          <a:graphicData uri="http://schemas.openxmlformats.org/drawingml/2006/table">
+            <a:tbl>
+              <a:tblPr firstRow="0" bandRow="0" firstCol="0" lastRow="0" lastCol="0" bandCol="0"/>
+              <a:tblGrid>
+                <a:gridCol w="1641348"/>
+                <a:gridCol w="1641348"/>
+                <a:gridCol w="1641348"/>
+                <a:gridCol w="1641348"/>
+              </a:tblGrid>
+              <a:tr h="406400">
+                <a:tc>
+                  <a:txBody>
+                    <a:bodyPr/>
+                    <a:lstStyle/>
+                    <a:p>
+                      <a:r>
+                        <a:rPr sz="1300" b="0">
+                          <a:solidFill>
+                            <a:srgbClr val="FFFFFF"/>
+                          </a:solidFill>
+                          <a:latin typeface="Pretendard Medium"/>
+                        </a:rPr>
+                        <a:t>차량</a:t>
+                      </a:r>
+                    </a:p>
+                  </a:txBody>
+                  <a:tcPr marL="101600" marR="101600" marT="76200" marB="76200" anchor="ctr">
+                    <a:solidFill>
+                      <a:srgbClr val="000000"/>
+                    </a:solidFill>
+                    <a:lnL w="0">
+                      <a:noFill/>
+                    </a:lnL>
+                    <a:lnR w="0">
+                      <a:noFill/>
+                    </a:lnR>
+                    <a:lnT w="0">
+                      <a:noFill/>
+                    </a:lnT>
+                    <a:lnB w="0">
+                      <a:noFill/>
+                    </a:lnB>
+                  </a:tcPr>
+                </a:tc>
+                <a:tc>
+                  <a:txBody>
+                    <a:bodyPr/>
+                    <a:lstStyle/>
+                    <a:p>
+                      <a:r>
+                        <a:rPr sz="1300" b="0">
+                          <a:solidFill>
+                            <a:srgbClr val="FFFFFF"/>
+                          </a:solidFill>
+                          <a:latin typeface="Pretendard Medium"/>
+                        </a:rPr>
+                        <a:t>수요</a:t>
+                      </a:r>
+                    </a:p>
+                  </a:txBody>
+                  <a:tcPr marL="101600" marR="101600" marT="76200" marB="76200" anchor="ctr">
+                    <a:solidFill>
+                      <a:srgbClr val="000000"/>
+                    </a:solidFill>
+                    <a:lnL w="0">
+                      <a:noFill/>
+                    </a:lnL>
+                    <a:lnR w="0">
+                      <a:noFill/>
+                    </a:lnR>
+                    <a:lnT w="0">
+                      <a:noFill/>
+                    </a:lnT>
+                    <a:lnB w="0">
+                      <a:noFill/>
+                    </a:lnB>
+                  </a:tcPr>
+                </a:tc>
+                <a:tc>
+                  <a:txBody>
+                    <a:bodyPr/>
+                    <a:lstStyle/>
+                    <a:p>
+                      <a:r>
+                        <a:rPr sz="1300" b="0">
+                          <a:solidFill>
+                            <a:srgbClr val="FFFFFF"/>
+                          </a:solidFill>
+                          <a:latin typeface="Pretendard Medium"/>
+                        </a:rPr>
+                        <a:t>서비스율</a:t>
+                      </a:r>
+                    </a:p>
+                  </a:txBody>
+                  <a:tcPr marL="101600" marR="101600" marT="76200" marB="76200" anchor="ctr">
+                    <a:solidFill>
+                      <a:srgbClr val="000000"/>
+                    </a:solidFill>
+                    <a:lnL w="0">
+                      <a:noFill/>
+                    </a:lnL>
+                    <a:lnR w="0">
+                      <a:noFill/>
+                    </a:lnR>
+                    <a:lnT w="0">
+                      <a:noFill/>
+                    </a:lnT>
+                    <a:lnB w="0">
+                      <a:noFill/>
+                    </a:lnB>
+                  </a:tcPr>
+                </a:tc>
+                <a:tc>
+                  <a:txBody>
+                    <a:bodyPr/>
+                    <a:lstStyle/>
+                    <a:p>
+                      <a:r>
+                        <a:rPr sz="1300" b="0">
+                          <a:solidFill>
+                            <a:srgbClr val="FFFFFF"/>
+                          </a:solidFill>
+                          <a:latin typeface="Pretendard Medium"/>
+                        </a:rPr>
+                        <a:t>평균 대기</a:t>
+                      </a:r>
+                    </a:p>
+                  </a:txBody>
+                  <a:tcPr marL="101600" marR="101600" marT="76200" marB="76200" anchor="ctr">
+                    <a:solidFill>
+                      <a:srgbClr val="000000"/>
+                    </a:solidFill>
+                    <a:lnL w="0">
+                      <a:noFill/>
+                    </a:lnL>
+                    <a:lnR w="0">
+                      <a:noFill/>
+                    </a:lnR>
+                    <a:lnT w="0">
+                      <a:noFill/>
+                    </a:lnT>
+                    <a:lnB w="0">
+                      <a:noFill/>
+                    </a:lnB>
+                  </a:tcPr>
+                </a:tc>
+              </a:tr>
+              <a:tr h="635000">
+                <a:tc>
+                  <a:txBody>
+                    <a:bodyPr/>
+                    <a:lstStyle/>
+                    <a:p>
+                      <a:r>
+                        <a:rPr sz="1300" b="1">
+                          <a:solidFill>
+                            <a:srgbClr val="000000"/>
+                          </a:solidFill>
+                          <a:latin typeface="Pretendard"/>
+                        </a:rPr>
+                        <a:t>300</a:t>
+                      </a:r>
+                    </a:p>
+                  </a:txBody>
+                  <a:tcPr marL="101600" marR="101600" marT="101600" marB="101600" anchor="ctr">
+                    <a:solidFill>
+                      <a:srgbClr val="FFFFFF"/>
+                    </a:solidFill>
+                    <a:lnL w="0">
+                      <a:noFill/>
+                    </a:lnL>
+                    <a:lnR w="0">
+                      <a:noFill/>
+                    </a:lnR>
+                    <a:lnT w="0">
+                      <a:noFill/>
+                    </a:lnT>
+                    <a:lnB w="9525">
+                      <a:solidFill>
+                        <a:srgbClr val="E2E2E2"/>
+                      </a:solidFill>
+                    </a:lnB>
+                  </a:tcPr>
+                </a:tc>
+                <a:tc>
+                  <a:txBody>
+                    <a:bodyPr/>
+                    <a:lstStyle/>
+                    <a:p>
+                      <a:r>
+                        <a:rPr sz="1300" b="0">
+                          <a:solidFill>
+                            <a:srgbClr val="5E5E5E"/>
+                          </a:solidFill>
+                          <a:latin typeface="Pretendard Medium"/>
+                        </a:rPr>
+                        <a:t>3,000</a:t>
+                      </a:r>
+                    </a:p>
+                  </a:txBody>
+                  <a:tcPr marL="101600" marR="101600" marT="101600" marB="101600" anchor="ctr">
+                    <a:solidFill>
+                      <a:srgbClr val="FFFFFF"/>
+                    </a:solidFill>
+                    <a:lnL w="0">
+                      <a:noFill/>
+                    </a:lnL>
+                    <a:lnR w="0">
+                      <a:noFill/>
+                    </a:lnR>
+                    <a:lnT w="0">
+                      <a:noFill/>
+                    </a:lnT>
+                    <a:lnB w="9525">
+                      <a:solidFill>
+                        <a:srgbClr val="E2E2E2"/>
+                      </a:solidFill>
+                    </a:lnB>
+                  </a:tcPr>
+                </a:tc>
+                <a:tc>
+                  <a:txBody>
+                    <a:bodyPr/>
+                    <a:lstStyle/>
+                    <a:p>
+                      <a:r>
+                        <a:rPr sz="1300" b="0">
+                          <a:solidFill>
+                            <a:srgbClr val="5E5E5E"/>
+                          </a:solidFill>
+                          <a:latin typeface="Pretendard Medium"/>
+                        </a:rPr>
+                        <a:t>79.5%</a:t>
+                      </a:r>
+                    </a:p>
+                  </a:txBody>
+                  <a:tcPr marL="101600" marR="101600" marT="101600" marB="101600" anchor="ctr">
+                    <a:solidFill>
+                      <a:srgbClr val="FFFFFF"/>
+                    </a:solidFill>
+                    <a:lnL w="0">
+                      <a:noFill/>
+                    </a:lnL>
+                    <a:lnR w="0">
+                      <a:noFill/>
+                    </a:lnR>
+                    <a:lnT w="0">
+                      <a:noFill/>
+                    </a:lnT>
+                    <a:lnB w="9525">
+                      <a:solidFill>
+                        <a:srgbClr val="E2E2E2"/>
+                      </a:solidFill>
+                    </a:lnB>
+                  </a:tcPr>
+                </a:tc>
+                <a:tc>
+                  <a:txBody>
+                    <a:bodyPr/>
+                    <a:lstStyle/>
+                    <a:p>
+                      <a:r>
+                        <a:rPr sz="1300" b="0">
+                          <a:solidFill>
+                            <a:srgbClr val="5E5E5E"/>
+                          </a:solidFill>
+                          <a:latin typeface="Pretendard Medium"/>
+                        </a:rPr>
+                        <a:t>5.7분</a:t>
+                      </a:r>
+                    </a:p>
+                  </a:txBody>
+                  <a:tcPr marL="101600" marR="101600" marT="101600" marB="101600" anchor="ctr">
+                    <a:solidFill>
+                      <a:srgbClr val="FFFFFF"/>
+                    </a:solidFill>
+                    <a:lnL w="0">
+                      <a:noFill/>
+                    </a:lnL>
+                    <a:lnR w="0">
+                      <a:noFill/>
+                    </a:lnR>
+                    <a:lnT w="0">
+                      <a:noFill/>
+                    </a:lnT>
+                    <a:lnB w="9525">
+                      <a:solidFill>
+                        <a:srgbClr val="E2E2E2"/>
+                      </a:solidFill>
+                    </a:lnB>
+                  </a:tcPr>
+                </a:tc>
+              </a:tr>
+              <a:tr h="635000">
+                <a:tc>
+                  <a:txBody>
+                    <a:bodyPr/>
+                    <a:lstStyle/>
+                    <a:p>
+                      <a:r>
+                        <a:rPr sz="1300" b="1">
+                          <a:solidFill>
+                            <a:srgbClr val="000000"/>
+                          </a:solidFill>
+                          <a:latin typeface="Pretendard"/>
+                        </a:rPr>
+                        <a:t>1,200</a:t>
+                      </a:r>
+                    </a:p>
+                  </a:txBody>
+                  <a:tcPr marL="101600" marR="101600" marT="101600" marB="101600" anchor="ctr">
+                    <a:solidFill>
+                      <a:srgbClr val="FFFFFF"/>
+                    </a:solidFill>
+                    <a:lnL w="0">
+                      <a:noFill/>
+                    </a:lnL>
+                    <a:lnR w="0">
+                      <a:noFill/>
+                    </a:lnR>
+                    <a:lnT w="0">
+                      <a:noFill/>
+                    </a:lnT>
+                    <a:lnB w="9525">
+                      <a:solidFill>
+                        <a:srgbClr val="E2E2E2"/>
+                      </a:solidFill>
+                    </a:lnB>
+                  </a:tcPr>
+                </a:tc>
+                <a:tc>
+                  <a:txBody>
+                    <a:bodyPr/>
+                    <a:lstStyle/>
+                    <a:p>
+                      <a:r>
+                        <a:rPr sz="1300" b="0">
+                          <a:solidFill>
+                            <a:srgbClr val="5E5E5E"/>
+                          </a:solidFill>
+                          <a:latin typeface="Pretendard Medium"/>
+                        </a:rPr>
+                        <a:t>12,000</a:t>
+                      </a:r>
+                    </a:p>
+                  </a:txBody>
+                  <a:tcPr marL="101600" marR="101600" marT="101600" marB="101600" anchor="ctr">
+                    <a:solidFill>
+                      <a:srgbClr val="FFFFFF"/>
+                    </a:solidFill>
+                    <a:lnL w="0">
+                      <a:noFill/>
+                    </a:lnL>
+                    <a:lnR w="0">
+                      <a:noFill/>
+                    </a:lnR>
+                    <a:lnT w="0">
+                      <a:noFill/>
+                    </a:lnT>
+                    <a:lnB w="9525">
+                      <a:solidFill>
+                        <a:srgbClr val="E2E2E2"/>
+                      </a:solidFill>
+                    </a:lnB>
+                  </a:tcPr>
+                </a:tc>
+                <a:tc>
+                  <a:txBody>
+                    <a:bodyPr/>
+                    <a:lstStyle/>
+                    <a:p>
+                      <a:r>
+                        <a:rPr sz="1300" b="0">
+                          <a:solidFill>
+                            <a:srgbClr val="5E5E5E"/>
+                          </a:solidFill>
+                          <a:latin typeface="Pretendard Medium"/>
+                        </a:rPr>
+                        <a:t>88.1%</a:t>
+                      </a:r>
+                    </a:p>
+                  </a:txBody>
+                  <a:tcPr marL="101600" marR="101600" marT="101600" marB="101600" anchor="ctr">
+                    <a:solidFill>
+                      <a:srgbClr val="FFFFFF"/>
+                    </a:solidFill>
+                    <a:lnL w="0">
+                      <a:noFill/>
+                    </a:lnL>
+                    <a:lnR w="0">
+                      <a:noFill/>
+                    </a:lnR>
+                    <a:lnT w="0">
+                      <a:noFill/>
+                    </a:lnT>
+                    <a:lnB w="9525">
+                      <a:solidFill>
+                        <a:srgbClr val="E2E2E2"/>
+                      </a:solidFill>
+                    </a:lnB>
+                  </a:tcPr>
+                </a:tc>
+                <a:tc>
+                  <a:txBody>
+                    <a:bodyPr/>
+                    <a:lstStyle/>
+                    <a:p>
+                      <a:r>
+                        <a:rPr sz="1300" b="0">
+                          <a:solidFill>
+                            <a:srgbClr val="5E5E5E"/>
+                          </a:solidFill>
+                          <a:latin typeface="Pretendard Medium"/>
+                        </a:rPr>
+                        <a:t>4.0분</a:t>
+                      </a:r>
+                    </a:p>
+                  </a:txBody>
+                  <a:tcPr marL="101600" marR="101600" marT="101600" marB="101600" anchor="ctr">
+                    <a:solidFill>
+                      <a:srgbClr val="FFFFFF"/>
+                    </a:solidFill>
+                    <a:lnL w="0">
+                      <a:noFill/>
+                    </a:lnL>
+                    <a:lnR w="0">
+                      <a:noFill/>
+                    </a:lnR>
+                    <a:lnT w="0">
+                      <a:noFill/>
+                    </a:lnT>
+                    <a:lnB w="9525">
+                      <a:solidFill>
+                        <a:srgbClr val="E2E2E2"/>
+                      </a:solidFill>
+                    </a:lnB>
+                  </a:tcPr>
+                </a:tc>
+              </a:tr>
+              <a:tr h="635000">
+                <a:tc>
+                  <a:txBody>
+                    <a:bodyPr/>
+                    <a:lstStyle/>
+                    <a:p>
+                      <a:r>
+                        <a:rPr sz="1300" b="1">
+                          <a:solidFill>
+                            <a:srgbClr val="000000"/>
+                          </a:solidFill>
+                          <a:latin typeface="Pretendard"/>
+                        </a:rPr>
+                        <a:t>6,000</a:t>
+                      </a:r>
+                    </a:p>
+                  </a:txBody>
+                  <a:tcPr marL="101600" marR="101600" marT="101600" marB="101600" anchor="ctr">
+                    <a:solidFill>
+                      <a:srgbClr val="FFFFFF"/>
+                    </a:solidFill>
+                    <a:lnL w="0">
+                      <a:noFill/>
+                    </a:lnL>
+                    <a:lnR w="0">
+                      <a:noFill/>
+                    </a:lnR>
+                    <a:lnT w="0">
+                      <a:noFill/>
+                    </a:lnT>
+                    <a:lnB w="9525">
+                      <a:solidFill>
+                        <a:srgbClr val="E2E2E2"/>
+                      </a:solidFill>
+                    </a:lnB>
+                  </a:tcPr>
+                </a:tc>
+                <a:tc>
+                  <a:txBody>
+                    <a:bodyPr/>
+                    <a:lstStyle/>
+                    <a:p>
+                      <a:r>
+                        <a:rPr sz="1300" b="0">
+                          <a:solidFill>
+                            <a:srgbClr val="5E5E5E"/>
+                          </a:solidFill>
+                          <a:latin typeface="Pretendard Medium"/>
+                        </a:rPr>
+                        <a:t>90,872</a:t>
+                      </a:r>
+                    </a:p>
+                  </a:txBody>
+                  <a:tcPr marL="101600" marR="101600" marT="101600" marB="101600" anchor="ctr">
+                    <a:solidFill>
+                      <a:srgbClr val="FFFFFF"/>
+                    </a:solidFill>
+                    <a:lnL w="0">
+                      <a:noFill/>
+                    </a:lnL>
+                    <a:lnR w="0">
+                      <a:noFill/>
+                    </a:lnR>
+                    <a:lnT w="0">
+                      <a:noFill/>
+                    </a:lnT>
+                    <a:lnB w="9525">
+                      <a:solidFill>
+                        <a:srgbClr val="E2E2E2"/>
+                      </a:solidFill>
+                    </a:lnB>
+                  </a:tcPr>
+                </a:tc>
+                <a:tc>
+                  <a:txBody>
+                    <a:bodyPr/>
+                    <a:lstStyle/>
+                    <a:p>
+                      <a:r>
+                        <a:rPr sz="1300" b="0">
+                          <a:solidFill>
+                            <a:srgbClr val="5E5E5E"/>
+                          </a:solidFill>
+                          <a:latin typeface="Pretendard Medium"/>
+                        </a:rPr>
+                        <a:t>69.4%</a:t>
+                      </a:r>
+                    </a:p>
+                  </a:txBody>
+                  <a:tcPr marL="101600" marR="101600" marT="101600" marB="101600" anchor="ctr">
+                    <a:solidFill>
+                      <a:srgbClr val="FFFFFF"/>
+                    </a:solidFill>
+                    <a:lnL w="0">
+                      <a:noFill/>
+                    </a:lnL>
+                    <a:lnR w="0">
+                      <a:noFill/>
+                    </a:lnR>
+                    <a:lnT w="0">
+                      <a:noFill/>
+                    </a:lnT>
+                    <a:lnB w="9525">
+                      <a:solidFill>
+                        <a:srgbClr val="E2E2E2"/>
+                      </a:solidFill>
+                    </a:lnB>
+                  </a:tcPr>
+                </a:tc>
+                <a:tc>
+                  <a:txBody>
+                    <a:bodyPr/>
+                    <a:lstStyle/>
+                    <a:p>
+                      <a:r>
+                        <a:rPr sz="1300" b="0">
+                          <a:solidFill>
+                            <a:srgbClr val="5E5E5E"/>
+                          </a:solidFill>
+                          <a:latin typeface="Pretendard Medium"/>
+                        </a:rPr>
+                        <a:t>2.7분</a:t>
+                      </a:r>
+                    </a:p>
+                  </a:txBody>
+                  <a:tcPr marL="101600" marR="101600" marT="101600" marB="101600" anchor="ctr">
+                    <a:solidFill>
+                      <a:srgbClr val="FFFFFF"/>
+                    </a:solidFill>
+                    <a:lnL w="0">
+                      <a:noFill/>
+                    </a:lnL>
+                    <a:lnR w="0">
+                      <a:noFill/>
+                    </a:lnR>
+                    <a:lnT w="0">
+                      <a:noFill/>
+                    </a:lnT>
+                    <a:lnB w="9525">
+                      <a:solidFill>
+                        <a:srgbClr val="E2E2E2"/>
+                      </a:solidFill>
+                    </a:lnB>
+                  </a:tcPr>
+                </a:tc>
+              </a:tr>
+            </a:tbl>
+          </a:graphicData>
+        </a:graphic>
+      </p:graphicFrame>
       <p:sp>
         <p:nvSpPr>
           <p:cNvPr id="25" name="Slide Number Placeholder 0"/>
@@ -10279,7 +10722,7 @@
             <a:pPr algn="r"/>
             <a:fld id="{F7021451-1387-4CA6-816F-3879F97B5CBC}" type="slidenum">
               <a:rPr b="0" lang="en-US"/>
-              <a:t>1004</a:t>
+              <a:t>1008</a:t>
             </a:fld>
             <a:endParaRPr lang="en-US"/>
           </a:p>
@@ -10294,6 +10737,172 @@
 </file>
 
 <file path=ppt/slides/slide21.xml><?xml version="1.0" encoding="utf-8"?>
+<p:sld xmlns:a="http://schemas.openxmlformats.org/drawingml/2006/main" xmlns:p="http://schemas.openxmlformats.org/presentationml/2006/main" xmlns:r="http://schemas.openxmlformats.org/officeDocument/2006/relationships">
+  <p:cSld>
+    <p:spTree>
+      <p:nvGrpSpPr>
+        <p:cNvPr id="1" name=""/>
+        <p:cNvGrpSpPr/>
+        <p:nvPr/>
+      </p:nvGrpSpPr>
+      <p:grpSpPr/>
+      <p:sp>
+        <p:nvSpPr>
+          <p:cNvPr id="2" name="Title 1"/>
+          <p:cNvSpPr>
+            <a:spLocks noGrp="1"/>
+          </p:cNvSpPr>
+          <p:nvPr>
+            <p:ph type="title" idx="100"/>
+          </p:nvPr>
+        </p:nvSpPr>
+        <p:spPr/>
+        <p:txBody>
+          <a:bodyPr/>
+          <a:lstStyle/>
+          <a:p>
+            <a:r>
+              <a:t>5.2 다음 단계</a:t>
+            </a:r>
+          </a:p>
+        </p:txBody>
+      </p:sp>
+      <p:sp>
+        <p:nvSpPr>
+          <p:cNvPr id="3" name="Text Placeholder 2"/>
+          <p:cNvSpPr>
+            <a:spLocks noGrp="1"/>
+          </p:cNvSpPr>
+          <p:nvPr>
+            <p:ph type="body" idx="101"/>
+          </p:nvPr>
+        </p:nvSpPr>
+        <p:spPr/>
+        <p:txBody>
+          <a:bodyPr/>
+          <a:lstStyle/>
+          <a:p>
+            <a:r>
+              <a:t>5. 앞으로 필요한 것</a:t>
+            </a:r>
+          </a:p>
+        </p:txBody>
+      </p:sp>
+      <p:sp>
+        <p:nvSpPr>
+          <p:cNvPr id="4" name="Text Placeholder 3"/>
+          <p:cNvSpPr>
+            <a:spLocks noGrp="1"/>
+          </p:cNvSpPr>
+          <p:nvPr>
+            <p:ph type="body" idx="102"/>
+          </p:nvPr>
+        </p:nvSpPr>
+        <p:spPr/>
+        <p:txBody>
+          <a:bodyPr/>
+          <a:lstStyle/>
+          <a:p>
+            <a:pPr/>
+            <a:r>
+              <a:t>결정변수 확장: 충전소 입지 + 배차·시각표·운전자 휴게 동시</a:t>
+            </a:r>
+          </a:p>
+          <a:p>
+            <a:pPr lvl="1"/>
+            <a:r>
+              <a:t>Ashkezari (2024)가 방향까지 제시, 수행 사례 없음</a:t>
+            </a:r>
+          </a:p>
+          <a:p>
+            <a:pPr/>
+            <a:r>
+              <a:t>해상도 전환: 시간당 집계 대수 → 개별 차량 운행표</a:t>
+            </a:r>
+          </a:p>
+          <a:p>
+            <a:pPr lvl="1"/>
+            <a:r>
+              <a:t>Liu (2021)의 flow 수준을 block 수준으로</a:t>
+            </a:r>
+          </a:p>
+          <a:p>
+            <a:pPr/>
+            <a:r>
+              <a:t>시뮬레이터: DTUMOS에 배터리·충전소 모델 부재 → 구현 대상</a:t>
+            </a:r>
+          </a:p>
+          <a:p>
+            <a:pPr lvl="1"/>
+            <a:r>
+              <a:t>충전 지연 → 배차 교란의 되먹임은 최적화보다 시뮬레이션에 적합</a:t>
+            </a:r>
+          </a:p>
+          <a:p>
+            <a:pPr/>
+            <a:r>
+              <a:t>검토 잔여: 미검토 4편 · 국내 문헌 추가 검색 · 버스 GTFS 확보</a:t>
+            </a:r>
+          </a:p>
+        </p:txBody>
+      </p:sp>
+      <p:sp>
+        <p:nvSpPr>
+          <p:cNvPr id="25" name="Slide Number Placeholder 0"/>
+          <p:cNvSpPr>
+            <a:spLocks noGrp="1"/>
+          </p:cNvSpPr>
+          <p:nvPr>
+            <p:ph type="sldNum" sz="quarter" idx="4294967295"/>
+          </p:nvPr>
+        </p:nvSpPr>
+        <p:spPr>
+          <a:xfrm>
+            <a:off x="10591495" y="6355080"/>
+            <a:ext cx="914400" cy="274320"/>
+          </a:xfrm>
+          <a:prstGeom prst="rect">
+            <a:avLst/>
+          </a:prstGeom>
+          <a:extLst>
+            <a:ext uri="{C572A759-6A51-4108-AA02-DFA0A04FC94B}">
+              <ma14:wrappingTextBoxFlag xmlns:ma14="http://schemas.microsoft.com/office/mac/drawingml/2011/main" val="0"/>
+            </a:ext>
+          </a:extLst>
+        </p:spPr>
+        <p:txBody>
+          <a:bodyPr/>
+          <a:lstStyle>
+            <a:lvl1pPr>
+              <a:defRPr sz="1000">
+                <a:solidFill>
+                  <a:srgbClr val="AFAFAF"/>
+                </a:solidFill>
+                <a:latin typeface="Pretendard Medium"/>
+                <a:ea typeface="Pretendard Medium"/>
+                <a:cs typeface="Pretendard Medium"/>
+              </a:defRPr>
+            </a:lvl1pPr>
+          </a:lstStyle>
+          <a:p>
+            <a:pPr algn="r"/>
+            <a:fld id="{F7021451-1387-4CA6-816F-3879F97B5CBC}" type="slidenum">
+              <a:rPr b="0" lang="en-US"/>
+              <a:t>1004</a:t>
+            </a:fld>
+            <a:endParaRPr lang="en-US"/>
+          </a:p>
+        </p:txBody>
+      </p:sp>
+    </p:spTree>
+  </p:cSld>
+  <p:clrMapOvr>
+    <a:masterClrMapping/>
+  </p:clrMapOvr>
+</p:sld>
+</file>
+
+<file path=ppt/slides/slide22.xml><?xml version="1.0" encoding="utf-8"?>
 <p:sld xmlns:a="http://schemas.openxmlformats.org/drawingml/2006/main" xmlns:p="http://schemas.openxmlformats.org/presentationml/2006/main" xmlns:r="http://schemas.openxmlformats.org/officeDocument/2006/relationships">
   <p:cSld>
     <p:spTree>
